--- a/assets/figures-editable/c3-c4/c3-e02.pptx
+++ b/assets/figures-editable/c3-c4/c3-e02.pptx
@@ -3104,8 +3104,8 @@
         </p:nvSpPr>
         <p:spPr>
           <a:xfrm>
-            <a:off x="274320" y="137160"/>
-            <a:ext cx="11612880" cy="365760"/>
+            <a:off x="274320" y="118872"/>
+            <a:ext cx="11612880" cy="340105"/>
           </a:xfrm>
           <a:prstGeom prst="rect">
             <a:avLst/>
@@ -3114,7 +3114,7 @@
           <a:effectLst/>
         </p:spPr>
         <p:txBody>
-          <a:bodyPr wrap="square" lIns="27432" rIns="27432" tIns="18288" bIns="18288" anchor="ctr">
+          <a:bodyPr wrap="none" lIns="18288" rIns="18288" tIns="18288" bIns="18288" anchor="t">
             <a:spAutoFit/>
           </a:bodyPr>
           <a:lstStyle/>
@@ -3125,7 +3125,7 @@
               </a:spcAft>
             </a:pPr>
             <a:r>
-              <a:rPr sz="2100" b="0" i="0">
+              <a:rPr sz="1900" b="1" i="0">
                 <a:solidFill>
                   <a:srgbClr val="8EDBD4"/>
                 </a:solidFill>
@@ -3138,19 +3138,1366 @@
       </p:sp>
       <p:sp>
         <p:nvSpPr>
-          <p:cNvPr id="3" name="C3-E02 ellipse 1" descr="sci-ppt:o001"/>
+          <p:cNvPr id="3" name="C3-E02 round_rect 1" descr="sci-ppt:o001"/>
           <p:cNvSpPr/>
           <p:nvPr/>
         </p:nvSpPr>
         <p:spPr>
           <a:xfrm>
-            <a:off x="1828800" y="914400"/>
-            <a:ext cx="2560320" cy="2560320"/>
+            <a:off x="365760" y="914400"/>
+            <a:ext cx="4206240" cy="4846320"/>
+          </a:xfrm>
+          <a:prstGeom prst="roundRect">
+            <a:avLst/>
+          </a:prstGeom>
+          <a:solidFill>
+            <a:srgbClr val="213E4B"/>
+          </a:solidFill>
+          <a:ln w="20320">
+            <a:solidFill>
+              <a:srgbClr val="8EDBD4"/>
+            </a:solidFill>
+          </a:ln>
+          <a:effectLst/>
+        </p:spPr>
+        <p:txBody>
+          <a:bodyPr rtlCol="0" anchor="ctr"/>
+          <a:lstStyle/>
+          <a:p>
+            <a:pPr algn="ctr"/>
+          </a:p>
+        </p:txBody>
+      </p:sp>
+      <p:sp>
+        <p:nvSpPr>
+          <p:cNvPr id="4" name="C3-E02 text 2" descr="sci-ppt:o002"/>
+          <p:cNvSpPr txBox="1"/>
+          <p:nvPr/>
+        </p:nvSpPr>
+        <p:spPr>
+          <a:xfrm>
+            <a:off x="475488" y="969264"/>
+            <a:ext cx="3986783" cy="254889"/>
+          </a:xfrm>
+          <a:prstGeom prst="rect">
+            <a:avLst/>
+          </a:prstGeom>
+          <a:noFill/>
+          <a:effectLst/>
+        </p:spPr>
+        <p:txBody>
+          <a:bodyPr wrap="none" lIns="18288" rIns="18288" tIns="18288" bIns="18288" anchor="t">
+            <a:spAutoFit/>
+          </a:bodyPr>
+          <a:lstStyle/>
+          <a:p>
+            <a:pPr algn="l">
+              <a:spcAft>
+                <a:spcPts val="0"/>
+              </a:spcAft>
+            </a:pPr>
+            <a:r>
+              <a:rPr sz="1350" b="1" i="0">
+                <a:solidFill>
+                  <a:srgbClr val="8EDBD4"/>
+                </a:solidFill>
+                <a:latin typeface="Arial"/>
+              </a:rPr>
+              <a:t>Array inside the beam</a:t>
+            </a:r>
+          </a:p>
+        </p:txBody>
+      </p:sp>
+      <p:sp>
+        <p:nvSpPr>
+          <p:cNvPr id="5" name="C3-E02 ellipse 3" descr="sci-ppt:o003"/>
+          <p:cNvSpPr/>
+          <p:nvPr/>
+        </p:nvSpPr>
+        <p:spPr>
+          <a:xfrm>
+            <a:off x="640080" y="1554480"/>
+            <a:ext cx="3657600" cy="3657600"/>
           </a:xfrm>
           <a:prstGeom prst="ellipse">
             <a:avLst/>
           </a:prstGeom>
+          <a:solidFill>
+            <a:srgbClr val="8EDBD4">
+              <a:alpha val="7243"/>
+            </a:srgbClr>
+          </a:solidFill>
+          <a:ln>
+            <a:solidFill>
+              <a:srgbClr val="8EDBD4">
+                <a:alpha val="7243"/>
+              </a:srgbClr>
+            </a:solidFill>
+          </a:ln>
+          <a:effectLst/>
+        </p:spPr>
+        <p:txBody>
+          <a:bodyPr rtlCol="0" anchor="ctr"/>
+          <a:lstStyle/>
+          <a:p>
+            <a:pPr algn="ctr"/>
+          </a:p>
+        </p:txBody>
+      </p:sp>
+      <p:sp>
+        <p:nvSpPr>
+          <p:cNvPr id="6" name="C3-E02 ellipse 4" descr="sci-ppt:o004"/>
+          <p:cNvSpPr/>
+          <p:nvPr/>
+        </p:nvSpPr>
+        <p:spPr>
+          <a:xfrm>
+            <a:off x="723207" y="1637607"/>
+            <a:ext cx="3491345" cy="3491345"/>
+          </a:xfrm>
+          <a:prstGeom prst="ellipse">
+            <a:avLst/>
+          </a:prstGeom>
+          <a:solidFill>
+            <a:srgbClr val="8EDBD4">
+              <a:alpha val="8915"/>
+            </a:srgbClr>
+          </a:solidFill>
+          <a:ln>
+            <a:solidFill>
+              <a:srgbClr val="8EDBD4">
+                <a:alpha val="8915"/>
+              </a:srgbClr>
+            </a:solidFill>
+          </a:ln>
+          <a:effectLst/>
+        </p:spPr>
+        <p:txBody>
+          <a:bodyPr rtlCol="0" anchor="ctr"/>
+          <a:lstStyle/>
+          <a:p>
+            <a:pPr algn="ctr"/>
+          </a:p>
+        </p:txBody>
+      </p:sp>
+      <p:sp>
+        <p:nvSpPr>
+          <p:cNvPr id="7" name="C3-E02 ellipse 5" descr="sci-ppt:o005"/>
+          <p:cNvSpPr/>
+          <p:nvPr/>
+        </p:nvSpPr>
+        <p:spPr>
+          <a:xfrm>
+            <a:off x="806334" y="1720734"/>
+            <a:ext cx="3325090" cy="3325090"/>
+          </a:xfrm>
+          <a:prstGeom prst="ellipse">
+            <a:avLst/>
+          </a:prstGeom>
+          <a:solidFill>
+            <a:srgbClr val="8EDBD4">
+              <a:alpha val="10867"/>
+            </a:srgbClr>
+          </a:solidFill>
+          <a:ln>
+            <a:solidFill>
+              <a:srgbClr val="8EDBD4">
+                <a:alpha val="10867"/>
+              </a:srgbClr>
+            </a:solidFill>
+          </a:ln>
+          <a:effectLst/>
+        </p:spPr>
+        <p:txBody>
+          <a:bodyPr rtlCol="0" anchor="ctr"/>
+          <a:lstStyle/>
+          <a:p>
+            <a:pPr algn="ctr"/>
+          </a:p>
+        </p:txBody>
+      </p:sp>
+      <p:sp>
+        <p:nvSpPr>
+          <p:cNvPr id="8" name="C3-E02 ellipse 6" descr="sci-ppt:o006"/>
+          <p:cNvSpPr/>
+          <p:nvPr/>
+        </p:nvSpPr>
+        <p:spPr>
+          <a:xfrm>
+            <a:off x="889461" y="1803861"/>
+            <a:ext cx="3158836" cy="3158836"/>
+          </a:xfrm>
+          <a:prstGeom prst="ellipse">
+            <a:avLst/>
+          </a:prstGeom>
+          <a:solidFill>
+            <a:srgbClr val="8EDBD4">
+              <a:alpha val="13119"/>
+            </a:srgbClr>
+          </a:solidFill>
+          <a:ln>
+            <a:solidFill>
+              <a:srgbClr val="8EDBD4">
+                <a:alpha val="13119"/>
+              </a:srgbClr>
+            </a:solidFill>
+          </a:ln>
+          <a:effectLst/>
+        </p:spPr>
+        <p:txBody>
+          <a:bodyPr rtlCol="0" anchor="ctr"/>
+          <a:lstStyle/>
+          <a:p>
+            <a:pPr algn="ctr"/>
+          </a:p>
+        </p:txBody>
+      </p:sp>
+      <p:sp>
+        <p:nvSpPr>
+          <p:cNvPr id="9" name="C3-E02 ellipse 7" descr="sci-ppt:o007"/>
+          <p:cNvSpPr/>
+          <p:nvPr/>
+        </p:nvSpPr>
+        <p:spPr>
+          <a:xfrm>
+            <a:off x="972589" y="1886989"/>
+            <a:ext cx="2992581" cy="2992581"/>
+          </a:xfrm>
+          <a:prstGeom prst="ellipse">
+            <a:avLst/>
+          </a:prstGeom>
+          <a:solidFill>
+            <a:srgbClr val="8EDBD4">
+              <a:alpha val="15685"/>
+            </a:srgbClr>
+          </a:solidFill>
+          <a:ln>
+            <a:solidFill>
+              <a:srgbClr val="8EDBD4">
+                <a:alpha val="15685"/>
+              </a:srgbClr>
+            </a:solidFill>
+          </a:ln>
+          <a:effectLst/>
+        </p:spPr>
+        <p:txBody>
+          <a:bodyPr rtlCol="0" anchor="ctr"/>
+          <a:lstStyle/>
+          <a:p>
+            <a:pPr algn="ctr"/>
+          </a:p>
+        </p:txBody>
+      </p:sp>
+      <p:sp>
+        <p:nvSpPr>
+          <p:cNvPr id="10" name="C3-E02 ellipse 8" descr="sci-ppt:o008"/>
+          <p:cNvSpPr/>
+          <p:nvPr/>
+        </p:nvSpPr>
+        <p:spPr>
+          <a:xfrm>
+            <a:off x="1055716" y="1970116"/>
+            <a:ext cx="2826327" cy="2826327"/>
+          </a:xfrm>
+          <a:prstGeom prst="ellipse">
+            <a:avLst/>
+          </a:prstGeom>
+          <a:solidFill>
+            <a:srgbClr val="8EDBD4">
+              <a:alpha val="18574"/>
+            </a:srgbClr>
+          </a:solidFill>
+          <a:ln>
+            <a:solidFill>
+              <a:srgbClr val="8EDBD4">
+                <a:alpha val="18574"/>
+              </a:srgbClr>
+            </a:solidFill>
+          </a:ln>
+          <a:effectLst/>
+        </p:spPr>
+        <p:txBody>
+          <a:bodyPr rtlCol="0" anchor="ctr"/>
+          <a:lstStyle/>
+          <a:p>
+            <a:pPr algn="ctr"/>
+          </a:p>
+        </p:txBody>
+      </p:sp>
+      <p:sp>
+        <p:nvSpPr>
+          <p:cNvPr id="11" name="C3-E02 ellipse 9" descr="sci-ppt:o009"/>
+          <p:cNvSpPr/>
+          <p:nvPr/>
+        </p:nvSpPr>
+        <p:spPr>
+          <a:xfrm>
+            <a:off x="1138843" y="2053243"/>
+            <a:ext cx="2660072" cy="2660072"/>
+          </a:xfrm>
+          <a:prstGeom prst="ellipse">
+            <a:avLst/>
+          </a:prstGeom>
+          <a:solidFill>
+            <a:srgbClr val="8EDBD4">
+              <a:alpha val="21783"/>
+            </a:srgbClr>
+          </a:solidFill>
+          <a:ln>
+            <a:solidFill>
+              <a:srgbClr val="8EDBD4">
+                <a:alpha val="21783"/>
+              </a:srgbClr>
+            </a:solidFill>
+          </a:ln>
+          <a:effectLst/>
+        </p:spPr>
+        <p:txBody>
+          <a:bodyPr rtlCol="0" anchor="ctr"/>
+          <a:lstStyle/>
+          <a:p>
+            <a:pPr algn="ctr"/>
+          </a:p>
+        </p:txBody>
+      </p:sp>
+      <p:sp>
+        <p:nvSpPr>
+          <p:cNvPr id="12" name="C3-E02 ellipse 10" descr="sci-ppt:o010"/>
+          <p:cNvSpPr/>
+          <p:nvPr/>
+        </p:nvSpPr>
+        <p:spPr>
+          <a:xfrm>
+            <a:off x="1221970" y="2136370"/>
+            <a:ext cx="2493818" cy="2493818"/>
+          </a:xfrm>
+          <a:prstGeom prst="ellipse">
+            <a:avLst/>
+          </a:prstGeom>
+          <a:solidFill>
+            <a:srgbClr val="8EDBD4">
+              <a:alpha val="25301"/>
+            </a:srgbClr>
+          </a:solidFill>
+          <a:ln>
+            <a:solidFill>
+              <a:srgbClr val="8EDBD4">
+                <a:alpha val="25301"/>
+              </a:srgbClr>
+            </a:solidFill>
+          </a:ln>
+          <a:effectLst/>
+        </p:spPr>
+        <p:txBody>
+          <a:bodyPr rtlCol="0" anchor="ctr"/>
+          <a:lstStyle/>
+          <a:p>
+            <a:pPr algn="ctr"/>
+          </a:p>
+        </p:txBody>
+      </p:sp>
+      <p:sp>
+        <p:nvSpPr>
+          <p:cNvPr id="13" name="C3-E02 ellipse 11" descr="sci-ppt:o011"/>
+          <p:cNvSpPr/>
+          <p:nvPr/>
+        </p:nvSpPr>
+        <p:spPr>
+          <a:xfrm>
+            <a:off x="1305098" y="2219498"/>
+            <a:ext cx="2327563" cy="2327563"/>
+          </a:xfrm>
+          <a:prstGeom prst="ellipse">
+            <a:avLst/>
+          </a:prstGeom>
+          <a:solidFill>
+            <a:srgbClr val="8EDBD4">
+              <a:alpha val="29105"/>
+            </a:srgbClr>
+          </a:solidFill>
+          <a:ln>
+            <a:solidFill>
+              <a:srgbClr val="8EDBD4">
+                <a:alpha val="29105"/>
+              </a:srgbClr>
+            </a:solidFill>
+          </a:ln>
+          <a:effectLst/>
+        </p:spPr>
+        <p:txBody>
+          <a:bodyPr rtlCol="0" anchor="ctr"/>
+          <a:lstStyle/>
+          <a:p>
+            <a:pPr algn="ctr"/>
+          </a:p>
+        </p:txBody>
+      </p:sp>
+      <p:sp>
+        <p:nvSpPr>
+          <p:cNvPr id="14" name="C3-E02 ellipse 12" descr="sci-ppt:o012"/>
+          <p:cNvSpPr/>
+          <p:nvPr/>
+        </p:nvSpPr>
+        <p:spPr>
+          <a:xfrm>
+            <a:off x="1388225" y="2302625"/>
+            <a:ext cx="2161309" cy="2161309"/>
+          </a:xfrm>
+          <a:prstGeom prst="ellipse">
+            <a:avLst/>
+          </a:prstGeom>
+          <a:solidFill>
+            <a:srgbClr val="8EDBD4">
+              <a:alpha val="33159"/>
+            </a:srgbClr>
+          </a:solidFill>
+          <a:ln>
+            <a:solidFill>
+              <a:srgbClr val="8EDBD4">
+                <a:alpha val="33159"/>
+              </a:srgbClr>
+            </a:solidFill>
+          </a:ln>
+          <a:effectLst/>
+        </p:spPr>
+        <p:txBody>
+          <a:bodyPr rtlCol="0" anchor="ctr"/>
+          <a:lstStyle/>
+          <a:p>
+            <a:pPr algn="ctr"/>
+          </a:p>
+        </p:txBody>
+      </p:sp>
+      <p:sp>
+        <p:nvSpPr>
+          <p:cNvPr id="15" name="C3-E02 ellipse 13" descr="sci-ppt:o013"/>
+          <p:cNvSpPr/>
+          <p:nvPr/>
+        </p:nvSpPr>
+        <p:spPr>
+          <a:xfrm>
+            <a:off x="1471352" y="2385752"/>
+            <a:ext cx="1995054" cy="1995054"/>
+          </a:xfrm>
+          <a:prstGeom prst="ellipse">
+            <a:avLst/>
+          </a:prstGeom>
+          <a:solidFill>
+            <a:srgbClr val="8EDBD4">
+              <a:alpha val="37414"/>
+            </a:srgbClr>
+          </a:solidFill>
+          <a:ln>
+            <a:solidFill>
+              <a:srgbClr val="8EDBD4">
+                <a:alpha val="37414"/>
+              </a:srgbClr>
+            </a:solidFill>
+          </a:ln>
+          <a:effectLst/>
+        </p:spPr>
+        <p:txBody>
+          <a:bodyPr rtlCol="0" anchor="ctr"/>
+          <a:lstStyle/>
+          <a:p>
+            <a:pPr algn="ctr"/>
+          </a:p>
+        </p:txBody>
+      </p:sp>
+      <p:sp>
+        <p:nvSpPr>
+          <p:cNvPr id="16" name="C3-E02 ellipse 14" descr="sci-ppt:o014"/>
+          <p:cNvSpPr/>
+          <p:nvPr/>
+        </p:nvSpPr>
+        <p:spPr>
+          <a:xfrm>
+            <a:off x="1554480" y="2468880"/>
+            <a:ext cx="1828800" cy="1828800"/>
+          </a:xfrm>
+          <a:prstGeom prst="ellipse">
+            <a:avLst/>
+          </a:prstGeom>
+          <a:solidFill>
+            <a:srgbClr val="8EDBD4">
+              <a:alpha val="41809"/>
+            </a:srgbClr>
+          </a:solidFill>
+          <a:ln>
+            <a:solidFill>
+              <a:srgbClr val="8EDBD4">
+                <a:alpha val="41809"/>
+              </a:srgbClr>
+            </a:solidFill>
+          </a:ln>
+          <a:effectLst/>
+        </p:spPr>
+        <p:txBody>
+          <a:bodyPr rtlCol="0" anchor="ctr"/>
+          <a:lstStyle/>
+          <a:p>
+            <a:pPr algn="ctr"/>
+          </a:p>
+        </p:txBody>
+      </p:sp>
+      <p:sp>
+        <p:nvSpPr>
+          <p:cNvPr id="17" name="C3-E02 ellipse 15" descr="sci-ppt:o015"/>
+          <p:cNvSpPr/>
+          <p:nvPr/>
+        </p:nvSpPr>
+        <p:spPr>
+          <a:xfrm>
+            <a:off x="1637607" y="2552007"/>
+            <a:ext cx="1662545" cy="1662545"/>
+          </a:xfrm>
+          <a:prstGeom prst="ellipse">
+            <a:avLst/>
+          </a:prstGeom>
+          <a:solidFill>
+            <a:srgbClr val="8EDBD4">
+              <a:alpha val="46272"/>
+            </a:srgbClr>
+          </a:solidFill>
+          <a:ln>
+            <a:solidFill>
+              <a:srgbClr val="8EDBD4">
+                <a:alpha val="46272"/>
+              </a:srgbClr>
+            </a:solidFill>
+          </a:ln>
+          <a:effectLst/>
+        </p:spPr>
+        <p:txBody>
+          <a:bodyPr rtlCol="0" anchor="ctr"/>
+          <a:lstStyle/>
+          <a:p>
+            <a:pPr algn="ctr"/>
+          </a:p>
+        </p:txBody>
+      </p:sp>
+      <p:sp>
+        <p:nvSpPr>
+          <p:cNvPr id="18" name="C3-E02 ellipse 16" descr="sci-ppt:o016"/>
+          <p:cNvSpPr/>
+          <p:nvPr/>
+        </p:nvSpPr>
+        <p:spPr>
+          <a:xfrm>
+            <a:off x="1720734" y="2635134"/>
+            <a:ext cx="1496290" cy="1496290"/>
+          </a:xfrm>
+          <a:prstGeom prst="ellipse">
+            <a:avLst/>
+          </a:prstGeom>
+          <a:solidFill>
+            <a:srgbClr val="8EDBD4">
+              <a:alpha val="50719"/>
+            </a:srgbClr>
+          </a:solidFill>
+          <a:ln>
+            <a:solidFill>
+              <a:srgbClr val="8EDBD4">
+                <a:alpha val="50719"/>
+              </a:srgbClr>
+            </a:solidFill>
+          </a:ln>
+          <a:effectLst/>
+        </p:spPr>
+        <p:txBody>
+          <a:bodyPr rtlCol="0" anchor="ctr"/>
+          <a:lstStyle/>
+          <a:p>
+            <a:pPr algn="ctr"/>
+          </a:p>
+        </p:txBody>
+      </p:sp>
+      <p:sp>
+        <p:nvSpPr>
+          <p:cNvPr id="19" name="C3-E02 ellipse 17" descr="sci-ppt:o017"/>
+          <p:cNvSpPr/>
+          <p:nvPr/>
+        </p:nvSpPr>
+        <p:spPr>
+          <a:xfrm>
+            <a:off x="1803861" y="2718261"/>
+            <a:ext cx="1330036" cy="1330036"/>
+          </a:xfrm>
+          <a:prstGeom prst="ellipse">
+            <a:avLst/>
+          </a:prstGeom>
+          <a:solidFill>
+            <a:srgbClr val="8EDBD4">
+              <a:alpha val="55059"/>
+            </a:srgbClr>
+          </a:solidFill>
+          <a:ln>
+            <a:solidFill>
+              <a:srgbClr val="8EDBD4">
+                <a:alpha val="55059"/>
+              </a:srgbClr>
+            </a:solidFill>
+          </a:ln>
+          <a:effectLst/>
+        </p:spPr>
+        <p:txBody>
+          <a:bodyPr rtlCol="0" anchor="ctr"/>
+          <a:lstStyle/>
+          <a:p>
+            <a:pPr algn="ctr"/>
+          </a:p>
+        </p:txBody>
+      </p:sp>
+      <p:sp>
+        <p:nvSpPr>
+          <p:cNvPr id="20" name="C3-E02 ellipse 18" descr="sci-ppt:o018"/>
+          <p:cNvSpPr/>
+          <p:nvPr/>
+        </p:nvSpPr>
+        <p:spPr>
+          <a:xfrm>
+            <a:off x="1886989" y="2801389"/>
+            <a:ext cx="1163781" cy="1163781"/>
+          </a:xfrm>
+          <a:prstGeom prst="ellipse">
+            <a:avLst/>
+          </a:prstGeom>
+          <a:solidFill>
+            <a:srgbClr val="8EDBD4">
+              <a:alpha val="59195"/>
+            </a:srgbClr>
+          </a:solidFill>
+          <a:ln>
+            <a:solidFill>
+              <a:srgbClr val="8EDBD4">
+                <a:alpha val="59195"/>
+              </a:srgbClr>
+            </a:solidFill>
+          </a:ln>
+          <a:effectLst/>
+        </p:spPr>
+        <p:txBody>
+          <a:bodyPr rtlCol="0" anchor="ctr"/>
+          <a:lstStyle/>
+          <a:p>
+            <a:pPr algn="ctr"/>
+          </a:p>
+        </p:txBody>
+      </p:sp>
+      <p:sp>
+        <p:nvSpPr>
+          <p:cNvPr id="21" name="C3-E02 ellipse 19" descr="sci-ppt:o019"/>
+          <p:cNvSpPr/>
+          <p:nvPr/>
+        </p:nvSpPr>
+        <p:spPr>
+          <a:xfrm>
+            <a:off x="1970116" y="2884516"/>
+            <a:ext cx="997527" cy="997527"/>
+          </a:xfrm>
+          <a:prstGeom prst="ellipse">
+            <a:avLst/>
+          </a:prstGeom>
+          <a:solidFill>
+            <a:srgbClr val="8EDBD4">
+              <a:alpha val="63031"/>
+            </a:srgbClr>
+          </a:solidFill>
+          <a:ln>
+            <a:solidFill>
+              <a:srgbClr val="8EDBD4">
+                <a:alpha val="63031"/>
+              </a:srgbClr>
+            </a:solidFill>
+          </a:ln>
+          <a:effectLst/>
+        </p:spPr>
+        <p:txBody>
+          <a:bodyPr rtlCol="0" anchor="ctr"/>
+          <a:lstStyle/>
+          <a:p>
+            <a:pPr algn="ctr"/>
+          </a:p>
+        </p:txBody>
+      </p:sp>
+      <p:sp>
+        <p:nvSpPr>
+          <p:cNvPr id="22" name="C3-E02 ellipse 20" descr="sci-ppt:o020"/>
+          <p:cNvSpPr/>
+          <p:nvPr/>
+        </p:nvSpPr>
+        <p:spPr>
+          <a:xfrm>
+            <a:off x="2053243" y="2967643"/>
+            <a:ext cx="831272" cy="831272"/>
+          </a:xfrm>
+          <a:prstGeom prst="ellipse">
+            <a:avLst/>
+          </a:prstGeom>
+          <a:solidFill>
+            <a:srgbClr val="8EDBD4">
+              <a:alpha val="66470"/>
+            </a:srgbClr>
+          </a:solidFill>
+          <a:ln>
+            <a:solidFill>
+              <a:srgbClr val="8EDBD4">
+                <a:alpha val="66470"/>
+              </a:srgbClr>
+            </a:solidFill>
+          </a:ln>
+          <a:effectLst/>
+        </p:spPr>
+        <p:txBody>
+          <a:bodyPr rtlCol="0" anchor="ctr"/>
+          <a:lstStyle/>
+          <a:p>
+            <a:pPr algn="ctr"/>
+          </a:p>
+        </p:txBody>
+      </p:sp>
+      <p:sp>
+        <p:nvSpPr>
+          <p:cNvPr id="23" name="C3-E02 ellipse 21" descr="sci-ppt:o021"/>
+          <p:cNvSpPr/>
+          <p:nvPr/>
+        </p:nvSpPr>
+        <p:spPr>
+          <a:xfrm>
+            <a:off x="2136370" y="3050770"/>
+            <a:ext cx="665018" cy="665018"/>
+          </a:xfrm>
+          <a:prstGeom prst="ellipse">
+            <a:avLst/>
+          </a:prstGeom>
+          <a:solidFill>
+            <a:srgbClr val="8EDBD4">
+              <a:alpha val="69423"/>
+            </a:srgbClr>
+          </a:solidFill>
+          <a:ln>
+            <a:solidFill>
+              <a:srgbClr val="8EDBD4">
+                <a:alpha val="69423"/>
+              </a:srgbClr>
+            </a:solidFill>
+          </a:ln>
+          <a:effectLst/>
+        </p:spPr>
+        <p:txBody>
+          <a:bodyPr rtlCol="0" anchor="ctr"/>
+          <a:lstStyle/>
+          <a:p>
+            <a:pPr algn="ctr"/>
+          </a:p>
+        </p:txBody>
+      </p:sp>
+      <p:sp>
+        <p:nvSpPr>
+          <p:cNvPr id="24" name="C3-E02 ellipse 22" descr="sci-ppt:o022"/>
+          <p:cNvSpPr/>
+          <p:nvPr/>
+        </p:nvSpPr>
+        <p:spPr>
+          <a:xfrm>
+            <a:off x="2219498" y="3133898"/>
+            <a:ext cx="498763" cy="498763"/>
+          </a:xfrm>
+          <a:prstGeom prst="ellipse">
+            <a:avLst/>
+          </a:prstGeom>
+          <a:solidFill>
+            <a:srgbClr val="8EDBD4">
+              <a:alpha val="71810"/>
+            </a:srgbClr>
+          </a:solidFill>
+          <a:ln>
+            <a:solidFill>
+              <a:srgbClr val="8EDBD4">
+                <a:alpha val="71810"/>
+              </a:srgbClr>
+            </a:solidFill>
+          </a:ln>
+          <a:effectLst/>
+        </p:spPr>
+        <p:txBody>
+          <a:bodyPr rtlCol="0" anchor="ctr"/>
+          <a:lstStyle/>
+          <a:p>
+            <a:pPr algn="ctr"/>
+          </a:p>
+        </p:txBody>
+      </p:sp>
+      <p:sp>
+        <p:nvSpPr>
+          <p:cNvPr id="25" name="C3-E02 ellipse 23" descr="sci-ppt:o023"/>
+          <p:cNvSpPr/>
+          <p:nvPr/>
+        </p:nvSpPr>
+        <p:spPr>
+          <a:xfrm>
+            <a:off x="2302625" y="3217025"/>
+            <a:ext cx="332509" cy="332509"/>
+          </a:xfrm>
+          <a:prstGeom prst="ellipse">
+            <a:avLst/>
+          </a:prstGeom>
+          <a:solidFill>
+            <a:srgbClr val="8EDBD4">
+              <a:alpha val="73565"/>
+            </a:srgbClr>
+          </a:solidFill>
+          <a:ln>
+            <a:solidFill>
+              <a:srgbClr val="8EDBD4">
+                <a:alpha val="73565"/>
+              </a:srgbClr>
+            </a:solidFill>
+          </a:ln>
+          <a:effectLst/>
+        </p:spPr>
+        <p:txBody>
+          <a:bodyPr rtlCol="0" anchor="ctr"/>
+          <a:lstStyle/>
+          <a:p>
+            <a:pPr algn="ctr"/>
+          </a:p>
+        </p:txBody>
+      </p:sp>
+      <p:sp>
+        <p:nvSpPr>
+          <p:cNvPr id="26" name="C3-E02 ellipse 24" descr="sci-ppt:o024"/>
+          <p:cNvSpPr/>
+          <p:nvPr/>
+        </p:nvSpPr>
+        <p:spPr>
+          <a:xfrm>
+            <a:off x="2385752" y="3300152"/>
+            <a:ext cx="166254" cy="166254"/>
+          </a:xfrm>
+          <a:prstGeom prst="ellipse">
+            <a:avLst/>
+          </a:prstGeom>
+          <a:solidFill>
+            <a:srgbClr val="8EDBD4">
+              <a:alpha val="74639"/>
+            </a:srgbClr>
+          </a:solidFill>
+          <a:ln>
+            <a:solidFill>
+              <a:srgbClr val="8EDBD4">
+                <a:alpha val="74639"/>
+              </a:srgbClr>
+            </a:solidFill>
+          </a:ln>
+          <a:effectLst/>
+        </p:spPr>
+        <p:txBody>
+          <a:bodyPr rtlCol="0" anchor="ctr"/>
+          <a:lstStyle/>
+          <a:p>
+            <a:pPr algn="ctr"/>
+          </a:p>
+        </p:txBody>
+      </p:sp>
+      <p:sp>
+        <p:nvSpPr>
+          <p:cNvPr id="27" name="C3-E02 ellipse 25" descr="sci-ppt:o025"/>
+          <p:cNvSpPr/>
+          <p:nvPr/>
+        </p:nvSpPr>
+        <p:spPr>
+          <a:xfrm>
+            <a:off x="777240" y="1691640"/>
+            <a:ext cx="3383280" cy="3383280"/>
+          </a:xfrm>
+          <a:prstGeom prst="ellipse">
+            <a:avLst/>
+          </a:prstGeom>
           <a:noFill/>
+          <a:ln w="25400">
+            <a:solidFill>
+              <a:srgbClr val="F2B880"/>
+            </a:solidFill>
+          </a:ln>
+          <a:effectLst/>
+        </p:spPr>
+        <p:txBody>
+          <a:bodyPr rtlCol="0" anchor="ctr"/>
+          <a:lstStyle/>
+          <a:p>
+            <a:pPr algn="ctr"/>
+          </a:p>
+        </p:txBody>
+      </p:sp>
+      <p:sp>
+        <p:nvSpPr>
+          <p:cNvPr id="28" name="C3-E02 text 26" descr="sci-ppt:o026"/>
+          <p:cNvSpPr txBox="1"/>
+          <p:nvPr/>
+        </p:nvSpPr>
+        <p:spPr>
+          <a:xfrm>
+            <a:off x="2194560" y="1371600"/>
+            <a:ext cx="1280160" cy="223900"/>
+          </a:xfrm>
+          <a:prstGeom prst="rect">
+            <a:avLst/>
+          </a:prstGeom>
+          <a:noFill/>
+          <a:effectLst/>
+        </p:spPr>
+        <p:txBody>
+          <a:bodyPr wrap="none" lIns="18288" rIns="18288" tIns="18288" bIns="18288" anchor="t">
+            <a:spAutoFit/>
+          </a:bodyPr>
+          <a:lstStyle/>
+          <a:p>
+            <a:pPr algn="l">
+              <a:spcAft>
+                <a:spcPts val="0"/>
+              </a:spcAft>
+            </a:pPr>
+            <a:r>
+              <a:rPr sz="1150" b="1" i="0">
+                <a:solidFill>
+                  <a:srgbClr val="F2B880"/>
+                </a:solidFill>
+                <a:latin typeface="Arial"/>
+              </a:rPr>
+              <a:t>beam w</a:t>
+            </a:r>
+          </a:p>
+        </p:txBody>
+      </p:sp>
+      <p:sp>
+        <p:nvSpPr>
+          <p:cNvPr id="29" name="C3-E02 ellipse 27" descr="sci-ppt:o027"/>
+          <p:cNvSpPr/>
+          <p:nvPr/>
+        </p:nvSpPr>
+        <p:spPr>
+          <a:xfrm>
+            <a:off x="2194777" y="3109177"/>
+            <a:ext cx="82296" cy="82296"/>
+          </a:xfrm>
+          <a:prstGeom prst="ellipse">
+            <a:avLst/>
+          </a:prstGeom>
+          <a:solidFill>
+            <a:srgbClr val="E7F0F3"/>
+          </a:solidFill>
+          <a:ln w="12700">
+            <a:solidFill>
+              <a:srgbClr val="E7F0F3"/>
+            </a:solidFill>
+          </a:ln>
+          <a:effectLst/>
+        </p:spPr>
+        <p:txBody>
+          <a:bodyPr rtlCol="0" anchor="ctr"/>
+          <a:lstStyle/>
+          <a:p>
+            <a:pPr algn="ctr"/>
+          </a:p>
+        </p:txBody>
+      </p:sp>
+      <p:sp>
+        <p:nvSpPr>
+          <p:cNvPr id="30" name="C3-E02 ellipse 28" descr="sci-ppt:o028"/>
+          <p:cNvSpPr/>
+          <p:nvPr/>
+        </p:nvSpPr>
+        <p:spPr>
+          <a:xfrm>
+            <a:off x="2194777" y="3342132"/>
+            <a:ext cx="82296" cy="82296"/>
+          </a:xfrm>
+          <a:prstGeom prst="ellipse">
+            <a:avLst/>
+          </a:prstGeom>
+          <a:solidFill>
+            <a:srgbClr val="E7F0F3"/>
+          </a:solidFill>
+          <a:ln w="12700">
+            <a:solidFill>
+              <a:srgbClr val="E7F0F3"/>
+            </a:solidFill>
+          </a:ln>
+          <a:effectLst/>
+        </p:spPr>
+        <p:txBody>
+          <a:bodyPr rtlCol="0" anchor="ctr"/>
+          <a:lstStyle/>
+          <a:p>
+            <a:pPr algn="ctr"/>
+          </a:p>
+        </p:txBody>
+      </p:sp>
+      <p:sp>
+        <p:nvSpPr>
+          <p:cNvPr id="31" name="C3-E02 ellipse 29" descr="sci-ppt:o029"/>
+          <p:cNvSpPr/>
+          <p:nvPr/>
+        </p:nvSpPr>
+        <p:spPr>
+          <a:xfrm>
+            <a:off x="2194777" y="3575086"/>
+            <a:ext cx="82296" cy="82296"/>
+          </a:xfrm>
+          <a:prstGeom prst="ellipse">
+            <a:avLst/>
+          </a:prstGeom>
+          <a:solidFill>
+            <a:srgbClr val="E7F0F3"/>
+          </a:solidFill>
+          <a:ln w="12700">
+            <a:solidFill>
+              <a:srgbClr val="E7F0F3"/>
+            </a:solidFill>
+          </a:ln>
+          <a:effectLst/>
+        </p:spPr>
+        <p:txBody>
+          <a:bodyPr rtlCol="0" anchor="ctr"/>
+          <a:lstStyle/>
+          <a:p>
+            <a:pPr algn="ctr"/>
+          </a:p>
+        </p:txBody>
+      </p:sp>
+      <p:sp>
+        <p:nvSpPr>
+          <p:cNvPr id="32" name="C3-E02 ellipse 30" descr="sci-ppt:o030"/>
+          <p:cNvSpPr/>
+          <p:nvPr/>
+        </p:nvSpPr>
+        <p:spPr>
+          <a:xfrm>
+            <a:off x="2427732" y="3109177"/>
+            <a:ext cx="82296" cy="82296"/>
+          </a:xfrm>
+          <a:prstGeom prst="ellipse">
+            <a:avLst/>
+          </a:prstGeom>
+          <a:solidFill>
+            <a:srgbClr val="E7F0F3"/>
+          </a:solidFill>
+          <a:ln w="12700">
+            <a:solidFill>
+              <a:srgbClr val="E7F0F3"/>
+            </a:solidFill>
+          </a:ln>
+          <a:effectLst/>
+        </p:spPr>
+        <p:txBody>
+          <a:bodyPr rtlCol="0" anchor="ctr"/>
+          <a:lstStyle/>
+          <a:p>
+            <a:pPr algn="ctr"/>
+          </a:p>
+        </p:txBody>
+      </p:sp>
+      <p:sp>
+        <p:nvSpPr>
+          <p:cNvPr id="33" name="C3-E02 ellipse 31" descr="sci-ppt:o031"/>
+          <p:cNvSpPr/>
+          <p:nvPr/>
+        </p:nvSpPr>
+        <p:spPr>
+          <a:xfrm>
+            <a:off x="2427732" y="3342132"/>
+            <a:ext cx="82296" cy="82296"/>
+          </a:xfrm>
+          <a:prstGeom prst="ellipse">
+            <a:avLst/>
+          </a:prstGeom>
+          <a:solidFill>
+            <a:srgbClr val="E7F0F3"/>
+          </a:solidFill>
+          <a:ln w="12700">
+            <a:solidFill>
+              <a:srgbClr val="E7F0F3"/>
+            </a:solidFill>
+          </a:ln>
+          <a:effectLst/>
+        </p:spPr>
+        <p:txBody>
+          <a:bodyPr rtlCol="0" anchor="ctr"/>
+          <a:lstStyle/>
+          <a:p>
+            <a:pPr algn="ctr"/>
+          </a:p>
+        </p:txBody>
+      </p:sp>
+      <p:sp>
+        <p:nvSpPr>
+          <p:cNvPr id="34" name="C3-E02 ellipse 32" descr="sci-ppt:o032"/>
+          <p:cNvSpPr/>
+          <p:nvPr/>
+        </p:nvSpPr>
+        <p:spPr>
+          <a:xfrm>
+            <a:off x="2427732" y="3575086"/>
+            <a:ext cx="82296" cy="82296"/>
+          </a:xfrm>
+          <a:prstGeom prst="ellipse">
+            <a:avLst/>
+          </a:prstGeom>
+          <a:solidFill>
+            <a:srgbClr val="E7F0F3"/>
+          </a:solidFill>
+          <a:ln w="12700">
+            <a:solidFill>
+              <a:srgbClr val="E7F0F3"/>
+            </a:solidFill>
+          </a:ln>
+          <a:effectLst/>
+        </p:spPr>
+        <p:txBody>
+          <a:bodyPr rtlCol="0" anchor="ctr"/>
+          <a:lstStyle/>
+          <a:p>
+            <a:pPr algn="ctr"/>
+          </a:p>
+        </p:txBody>
+      </p:sp>
+      <p:sp>
+        <p:nvSpPr>
+          <p:cNvPr id="35" name="C3-E02 ellipse 33" descr="sci-ppt:o033"/>
+          <p:cNvSpPr/>
+          <p:nvPr/>
+        </p:nvSpPr>
+        <p:spPr>
+          <a:xfrm>
+            <a:off x="2660686" y="3109177"/>
+            <a:ext cx="82296" cy="82296"/>
+          </a:xfrm>
+          <a:prstGeom prst="ellipse">
+            <a:avLst/>
+          </a:prstGeom>
+          <a:solidFill>
+            <a:srgbClr val="E7F0F3"/>
+          </a:solidFill>
+          <a:ln w="12700">
+            <a:solidFill>
+              <a:srgbClr val="E7F0F3"/>
+            </a:solidFill>
+          </a:ln>
+          <a:effectLst/>
+        </p:spPr>
+        <p:txBody>
+          <a:bodyPr rtlCol="0" anchor="ctr"/>
+          <a:lstStyle/>
+          <a:p>
+            <a:pPr algn="ctr"/>
+          </a:p>
+        </p:txBody>
+      </p:sp>
+      <p:sp>
+        <p:nvSpPr>
+          <p:cNvPr id="36" name="C3-E02 ellipse 34" descr="sci-ppt:o034"/>
+          <p:cNvSpPr/>
+          <p:nvPr/>
+        </p:nvSpPr>
+        <p:spPr>
+          <a:xfrm>
+            <a:off x="2660686" y="3342132"/>
+            <a:ext cx="82296" cy="82296"/>
+          </a:xfrm>
+          <a:prstGeom prst="ellipse">
+            <a:avLst/>
+          </a:prstGeom>
+          <a:solidFill>
+            <a:srgbClr val="E7F0F3"/>
+          </a:solidFill>
+          <a:ln w="12700">
+            <a:solidFill>
+              <a:srgbClr val="E7F0F3"/>
+            </a:solidFill>
+          </a:ln>
+          <a:effectLst/>
+        </p:spPr>
+        <p:txBody>
+          <a:bodyPr rtlCol="0" anchor="ctr"/>
+          <a:lstStyle/>
+          <a:p>
+            <a:pPr algn="ctr"/>
+          </a:p>
+        </p:txBody>
+      </p:sp>
+      <p:sp>
+        <p:nvSpPr>
+          <p:cNvPr id="37" name="C3-E02 ellipse 35" descr="sci-ppt:o035"/>
+          <p:cNvSpPr/>
+          <p:nvPr/>
+        </p:nvSpPr>
+        <p:spPr>
+          <a:xfrm>
+            <a:off x="2660686" y="3575086"/>
+            <a:ext cx="82296" cy="82296"/>
+          </a:xfrm>
+          <a:prstGeom prst="ellipse">
+            <a:avLst/>
+          </a:prstGeom>
+          <a:solidFill>
+            <a:srgbClr val="E7F0F3"/>
+          </a:solidFill>
+          <a:ln w="12700">
+            <a:solidFill>
+              <a:srgbClr val="E7F0F3"/>
+            </a:solidFill>
+          </a:ln>
+          <a:effectLst/>
+        </p:spPr>
+        <p:txBody>
+          <a:bodyPr rtlCol="0" anchor="ctr"/>
+          <a:lstStyle/>
+          <a:p>
+            <a:pPr algn="ctr"/>
+          </a:p>
+        </p:txBody>
+      </p:sp>
+      <p:sp>
+        <p:nvSpPr>
+          <p:cNvPr id="38" name="C3-E02 ellipse 36" descr="sci-ppt:o036"/>
+          <p:cNvSpPr/>
+          <p:nvPr/>
+        </p:nvSpPr>
+        <p:spPr>
+          <a:xfrm>
+            <a:off x="2080622" y="2995022"/>
+            <a:ext cx="776515" cy="776515"/>
+          </a:xfrm>
+          <a:prstGeom prst="ellipse">
+            <a:avLst/>
+          </a:prstGeom>
+          <a:noFill/>
+          <a:ln w="30480">
+            <a:solidFill>
+              <a:srgbClr val="F28BA0"/>
+            </a:solidFill>
+          </a:ln>
+          <a:effectLst/>
+        </p:spPr>
+        <p:txBody>
+          <a:bodyPr rtlCol="0" anchor="ctr"/>
+          <a:lstStyle/>
+          <a:p>
+            <a:pPr algn="ctr"/>
+          </a:p>
+        </p:txBody>
+      </p:sp>
+      <p:sp>
+        <p:nvSpPr>
+          <p:cNvPr id="39" name="C3-E02 text 37" descr="sci-ppt:o037"/>
+          <p:cNvSpPr txBox="1"/>
+          <p:nvPr/>
+        </p:nvSpPr>
+        <p:spPr>
+          <a:xfrm>
+            <a:off x="2560320" y="3817257"/>
+            <a:ext cx="1188720" cy="231648"/>
+          </a:xfrm>
+          <a:prstGeom prst="rect">
+            <a:avLst/>
+          </a:prstGeom>
+          <a:noFill/>
+          <a:effectLst/>
+        </p:spPr>
+        <p:txBody>
+          <a:bodyPr wrap="none" lIns="18288" rIns="18288" tIns="18288" bIns="18288" anchor="t">
+            <a:spAutoFit/>
+          </a:bodyPr>
+          <a:lstStyle/>
+          <a:p>
+            <a:pPr algn="l">
+              <a:spcAft>
+                <a:spcPts val="0"/>
+              </a:spcAft>
+            </a:pPr>
+            <a:r>
+              <a:rPr sz="1200" b="1" i="0">
+                <a:solidFill>
+                  <a:srgbClr val="F28BA0"/>
+                </a:solidFill>
+                <a:latin typeface="Arial"/>
+              </a:rPr>
+              <a:t>R_A</a:t>
+            </a:r>
+          </a:p>
+        </p:txBody>
+      </p:sp>
+      <p:sp>
+        <p:nvSpPr>
+          <p:cNvPr id="40" name="C3-E02 text 38" descr="sci-ppt:o038"/>
+          <p:cNvSpPr txBox="1"/>
+          <p:nvPr/>
+        </p:nvSpPr>
+        <p:spPr>
+          <a:xfrm>
+            <a:off x="502920" y="5120640"/>
+            <a:ext cx="3931920" cy="417576"/>
+          </a:xfrm>
+          <a:prstGeom prst="rect">
+            <a:avLst/>
+          </a:prstGeom>
+          <a:noFill/>
+          <a:effectLst/>
+        </p:spPr>
+        <p:txBody>
+          <a:bodyPr wrap="none" lIns="18288" rIns="18288" tIns="18288" bIns="18288" anchor="t">
+            <a:spAutoFit/>
+          </a:bodyPr>
+          <a:lstStyle/>
+          <a:p>
+            <a:pPr algn="l">
+              <a:spcAft>
+                <a:spcPts val="0"/>
+              </a:spcAft>
+            </a:pPr>
+            <a:r>
+              <a:rPr sz="1200" b="0" i="0">
+                <a:solidFill>
+                  <a:srgbClr val="E7F0F3"/>
+                </a:solidFill>
+                <a:latin typeface="Arial"/>
+              </a:rPr>
+              <a:t>Wide beam, small array: edge sites receive</a:t>
+            </a:r>
+          </a:p>
+          <a:p>
+            <a:pPr algn="l">
+              <a:spcAft>
+                <a:spcPts val="0"/>
+              </a:spcAft>
+            </a:pPr>
+            <a:r>
+              <a:rPr sz="1200" b="0" i="0">
+                <a:solidFill>
+                  <a:srgbClr val="E7F0F3"/>
+                </a:solidFill>
+                <a:latin typeface="Arial"/>
+              </a:rPr>
+              <a:t>nearly the same fluence as the centre.</a:t>
+            </a:r>
+          </a:p>
+        </p:txBody>
+      </p:sp>
+      <p:cxnSp>
+        <p:nvCxnSpPr>
+          <p:cNvPr id="41" name="C3-E02 line 39" descr="sci-ppt:o039"/>
+          <p:cNvCxnSpPr/>
+          <p:nvPr/>
+        </p:nvCxnSpPr>
+        <p:spPr>
+          <a:xfrm>
+            <a:off x="5760720" y="5029200"/>
+            <a:ext cx="5943600" cy="0"/>
+          </a:xfrm>
+          <a:prstGeom prst="line">
+            <a:avLst/>
+          </a:prstGeom>
           <a:ln w="19050">
             <a:solidFill>
               <a:srgbClr val="B4C7D2"/>
@@ -3158,29 +4505,21 @@
           </a:ln>
           <a:effectLst/>
         </p:spPr>
-        <p:txBody>
-          <a:bodyPr rtlCol="0" anchor="ctr"/>
-          <a:lstStyle/>
-          <a:p>
-            <a:pPr algn="ctr"/>
-          </a:p>
-        </p:txBody>
-      </p:sp>
-      <p:sp>
-        <p:nvSpPr>
-          <p:cNvPr id="4" name="C3-E02 ellipse 2" descr="sci-ppt:o002"/>
-          <p:cNvSpPr/>
-          <p:nvPr/>
-        </p:nvSpPr>
-        <p:spPr>
-          <a:xfrm>
-            <a:off x="2514600" y="1600200"/>
-            <a:ext cx="1188720" cy="1188720"/>
-          </a:xfrm>
-          <a:prstGeom prst="ellipse">
-            <a:avLst/>
-          </a:prstGeom>
-          <a:noFill/>
+      </p:cxnSp>
+      <p:cxnSp>
+        <p:nvCxnSpPr>
+          <p:cNvPr id="42" name="C3-E02 line 40" descr="sci-ppt:o040"/>
+          <p:cNvCxnSpPr/>
+          <p:nvPr/>
+        </p:nvCxnSpPr>
+        <p:spPr>
+          <a:xfrm>
+            <a:off x="5760720" y="1371600"/>
+            <a:ext cx="0" cy="3657600"/>
+          </a:xfrm>
+          <a:prstGeom prst="line">
+            <a:avLst/>
+          </a:prstGeom>
           <a:ln w="19050">
             <a:solidFill>
               <a:srgbClr val="B4C7D2"/>
@@ -3188,48 +4527,61 @@
           </a:ln>
           <a:effectLst/>
         </p:spPr>
-        <p:txBody>
-          <a:bodyPr rtlCol="0" anchor="ctr"/>
-          <a:lstStyle/>
-          <a:p>
-            <a:pPr algn="ctr"/>
-          </a:p>
-        </p:txBody>
-      </p:sp>
+      </p:cxnSp>
       <p:cxnSp>
         <p:nvCxnSpPr>
-          <p:cNvPr id="5" name="C3-E02 arrow 3" descr="sci-ppt:o003"/>
+          <p:cNvPr id="43" name="C3-E02 line 41" descr="sci-ppt:o041"/>
           <p:cNvCxnSpPr/>
           <p:nvPr/>
         </p:nvCxnSpPr>
         <p:spPr>
           <a:xfrm>
-            <a:off x="3108960" y="2194560"/>
-            <a:ext cx="1280160" cy="0"/>
+            <a:off x="5760720" y="5029200"/>
+            <a:ext cx="0" cy="64008"/>
           </a:xfrm>
           <a:prstGeom prst="line">
             <a:avLst/>
           </a:prstGeom>
-          <a:ln w="25400">
+          <a:ln w="12700">
             <a:solidFill>
-              <a:srgbClr val="8EDBD4"/>
+              <a:srgbClr val="B4C7D2"/>
             </a:solidFill>
-            <a:headEnd type="none" w="med" len="med"/>
-            <a:tailEnd type="triangle" w="med" len="med"/>
           </a:ln>
           <a:effectLst/>
         </p:spPr>
       </p:cxnSp>
-      <p:sp>
-        <p:nvSpPr>
-          <p:cNvPr id="6" name="C3-E02 text 4" descr="sci-ppt:o004"/>
+      <p:cxnSp>
+        <p:nvCxnSpPr>
+          <p:cNvPr id="44" name="C3-E02 line 42" descr="sci-ppt:o042"/>
+          <p:cNvCxnSpPr/>
+          <p:nvPr/>
+        </p:nvCxnSpPr>
+        <p:spPr>
+          <a:xfrm>
+            <a:off x="5760720" y="1371600"/>
+            <a:ext cx="0" cy="3657600"/>
+          </a:xfrm>
+          <a:prstGeom prst="line">
+            <a:avLst/>
+          </a:prstGeom>
+          <a:ln w="7620">
+            <a:solidFill>
+              <a:srgbClr val="2E4756"/>
+            </a:solidFill>
+          </a:ln>
+          <a:effectLst/>
+        </p:spPr>
+      </p:cxnSp>
+      <p:sp>
+        <p:nvSpPr>
+          <p:cNvPr id="45" name="C3-E02 text 43" descr="sci-ppt:o043"/>
           <p:cNvSpPr txBox="1"/>
           <p:nvPr/>
         </p:nvSpPr>
         <p:spPr>
           <a:xfrm>
-            <a:off x="3886200" y="1737360"/>
-            <a:ext cx="1828800" cy="365760"/>
+            <a:off x="5303520" y="5111496"/>
+            <a:ext cx="914400" cy="208407"/>
           </a:xfrm>
           <a:prstGeom prst="rect">
             <a:avLst/>
@@ -3238,7 +4590,697 @@
           <a:effectLst/>
         </p:spPr>
         <p:txBody>
-          <a:bodyPr wrap="square" lIns="27432" rIns="27432" tIns="18288" bIns="18288" anchor="ctr">
+          <a:bodyPr wrap="none" lIns="18288" rIns="18288" tIns="18288" bIns="18288" anchor="t">
+            <a:spAutoFit/>
+          </a:bodyPr>
+          <a:lstStyle/>
+          <a:p>
+            <a:pPr algn="ctr">
+              <a:spcAft>
+                <a:spcPts val="0"/>
+              </a:spcAft>
+            </a:pPr>
+            <a:r>
+              <a:rPr sz="1050" b="0" i="0">
+                <a:solidFill>
+                  <a:srgbClr val="B4C7D2"/>
+                </a:solidFill>
+                <a:latin typeface="Arial"/>
+              </a:rPr>
+              <a:t>0.0</a:t>
+            </a:r>
+          </a:p>
+        </p:txBody>
+      </p:sp>
+      <p:cxnSp>
+        <p:nvCxnSpPr>
+          <p:cNvPr id="46" name="C3-E02 line 44" descr="sci-ppt:o044"/>
+          <p:cNvCxnSpPr/>
+          <p:nvPr/>
+        </p:nvCxnSpPr>
+        <p:spPr>
+          <a:xfrm>
+            <a:off x="7741920" y="5029200"/>
+            <a:ext cx="0" cy="64008"/>
+          </a:xfrm>
+          <a:prstGeom prst="line">
+            <a:avLst/>
+          </a:prstGeom>
+          <a:ln w="12700">
+            <a:solidFill>
+              <a:srgbClr val="B4C7D2"/>
+            </a:solidFill>
+          </a:ln>
+          <a:effectLst/>
+        </p:spPr>
+      </p:cxnSp>
+      <p:cxnSp>
+        <p:nvCxnSpPr>
+          <p:cNvPr id="47" name="C3-E02 line 45" descr="sci-ppt:o045"/>
+          <p:cNvCxnSpPr/>
+          <p:nvPr/>
+        </p:nvCxnSpPr>
+        <p:spPr>
+          <a:xfrm>
+            <a:off x="7741920" y="1371600"/>
+            <a:ext cx="0" cy="3657600"/>
+          </a:xfrm>
+          <a:prstGeom prst="line">
+            <a:avLst/>
+          </a:prstGeom>
+          <a:ln w="7620">
+            <a:solidFill>
+              <a:srgbClr val="2E4756"/>
+            </a:solidFill>
+          </a:ln>
+          <a:effectLst/>
+        </p:spPr>
+      </p:cxnSp>
+      <p:sp>
+        <p:nvSpPr>
+          <p:cNvPr id="48" name="C3-E02 text 46" descr="sci-ppt:o046"/>
+          <p:cNvSpPr txBox="1"/>
+          <p:nvPr/>
+        </p:nvSpPr>
+        <p:spPr>
+          <a:xfrm>
+            <a:off x="7284720" y="5111496"/>
+            <a:ext cx="914400" cy="208407"/>
+          </a:xfrm>
+          <a:prstGeom prst="rect">
+            <a:avLst/>
+          </a:prstGeom>
+          <a:noFill/>
+          <a:effectLst/>
+        </p:spPr>
+        <p:txBody>
+          <a:bodyPr wrap="none" lIns="18288" rIns="18288" tIns="18288" bIns="18288" anchor="t">
+            <a:spAutoFit/>
+          </a:bodyPr>
+          <a:lstStyle/>
+          <a:p>
+            <a:pPr algn="ctr">
+              <a:spcAft>
+                <a:spcPts val="0"/>
+              </a:spcAft>
+            </a:pPr>
+            <a:r>
+              <a:rPr sz="1050" b="0" i="0">
+                <a:solidFill>
+                  <a:srgbClr val="B4C7D2"/>
+                </a:solidFill>
+                <a:latin typeface="Arial"/>
+              </a:rPr>
+              <a:t>0.1</a:t>
+            </a:r>
+          </a:p>
+        </p:txBody>
+      </p:sp>
+      <p:cxnSp>
+        <p:nvCxnSpPr>
+          <p:cNvPr id="49" name="C3-E02 line 47" descr="sci-ppt:o047"/>
+          <p:cNvCxnSpPr/>
+          <p:nvPr/>
+        </p:nvCxnSpPr>
+        <p:spPr>
+          <a:xfrm>
+            <a:off x="9723120" y="5029200"/>
+            <a:ext cx="0" cy="64008"/>
+          </a:xfrm>
+          <a:prstGeom prst="line">
+            <a:avLst/>
+          </a:prstGeom>
+          <a:ln w="12700">
+            <a:solidFill>
+              <a:srgbClr val="B4C7D2"/>
+            </a:solidFill>
+          </a:ln>
+          <a:effectLst/>
+        </p:spPr>
+      </p:cxnSp>
+      <p:cxnSp>
+        <p:nvCxnSpPr>
+          <p:cNvPr id="50" name="C3-E02 line 48" descr="sci-ppt:o048"/>
+          <p:cNvCxnSpPr/>
+          <p:nvPr/>
+        </p:nvCxnSpPr>
+        <p:spPr>
+          <a:xfrm>
+            <a:off x="9723120" y="1371600"/>
+            <a:ext cx="0" cy="3657600"/>
+          </a:xfrm>
+          <a:prstGeom prst="line">
+            <a:avLst/>
+          </a:prstGeom>
+          <a:ln w="7620">
+            <a:solidFill>
+              <a:srgbClr val="2E4756"/>
+            </a:solidFill>
+          </a:ln>
+          <a:effectLst/>
+        </p:spPr>
+      </p:cxnSp>
+      <p:sp>
+        <p:nvSpPr>
+          <p:cNvPr id="51" name="C3-E02 text 49" descr="sci-ppt:o049"/>
+          <p:cNvSpPr txBox="1"/>
+          <p:nvPr/>
+        </p:nvSpPr>
+        <p:spPr>
+          <a:xfrm>
+            <a:off x="9265920" y="5111496"/>
+            <a:ext cx="914400" cy="208407"/>
+          </a:xfrm>
+          <a:prstGeom prst="rect">
+            <a:avLst/>
+          </a:prstGeom>
+          <a:noFill/>
+          <a:effectLst/>
+        </p:spPr>
+        <p:txBody>
+          <a:bodyPr wrap="none" lIns="18288" rIns="18288" tIns="18288" bIns="18288" anchor="t">
+            <a:spAutoFit/>
+          </a:bodyPr>
+          <a:lstStyle/>
+          <a:p>
+            <a:pPr algn="ctr">
+              <a:spcAft>
+                <a:spcPts val="0"/>
+              </a:spcAft>
+            </a:pPr>
+            <a:r>
+              <a:rPr sz="1050" b="0" i="0">
+                <a:solidFill>
+                  <a:srgbClr val="B4C7D2"/>
+                </a:solidFill>
+                <a:latin typeface="Arial"/>
+              </a:rPr>
+              <a:t>0.2</a:t>
+            </a:r>
+          </a:p>
+        </p:txBody>
+      </p:sp>
+      <p:cxnSp>
+        <p:nvCxnSpPr>
+          <p:cNvPr id="52" name="C3-E02 line 50" descr="sci-ppt:o050"/>
+          <p:cNvCxnSpPr/>
+          <p:nvPr/>
+        </p:nvCxnSpPr>
+        <p:spPr>
+          <a:xfrm>
+            <a:off x="11704320" y="5029200"/>
+            <a:ext cx="0" cy="64008"/>
+          </a:xfrm>
+          <a:prstGeom prst="line">
+            <a:avLst/>
+          </a:prstGeom>
+          <a:ln w="12700">
+            <a:solidFill>
+              <a:srgbClr val="B4C7D2"/>
+            </a:solidFill>
+          </a:ln>
+          <a:effectLst/>
+        </p:spPr>
+      </p:cxnSp>
+      <p:cxnSp>
+        <p:nvCxnSpPr>
+          <p:cNvPr id="53" name="C3-E02 line 51" descr="sci-ppt:o051"/>
+          <p:cNvCxnSpPr/>
+          <p:nvPr/>
+        </p:nvCxnSpPr>
+        <p:spPr>
+          <a:xfrm>
+            <a:off x="11704320" y="1371600"/>
+            <a:ext cx="0" cy="3657600"/>
+          </a:xfrm>
+          <a:prstGeom prst="line">
+            <a:avLst/>
+          </a:prstGeom>
+          <a:ln w="7620">
+            <a:solidFill>
+              <a:srgbClr val="2E4756"/>
+            </a:solidFill>
+          </a:ln>
+          <a:effectLst/>
+        </p:spPr>
+      </p:cxnSp>
+      <p:sp>
+        <p:nvSpPr>
+          <p:cNvPr id="54" name="C3-E02 text 52" descr="sci-ppt:o052"/>
+          <p:cNvSpPr txBox="1"/>
+          <p:nvPr/>
+        </p:nvSpPr>
+        <p:spPr>
+          <a:xfrm>
+            <a:off x="11247120" y="5111496"/>
+            <a:ext cx="914400" cy="208407"/>
+          </a:xfrm>
+          <a:prstGeom prst="rect">
+            <a:avLst/>
+          </a:prstGeom>
+          <a:noFill/>
+          <a:effectLst/>
+        </p:spPr>
+        <p:txBody>
+          <a:bodyPr wrap="none" lIns="18288" rIns="18288" tIns="18288" bIns="18288" anchor="t">
+            <a:spAutoFit/>
+          </a:bodyPr>
+          <a:lstStyle/>
+          <a:p>
+            <a:pPr algn="ctr">
+              <a:spcAft>
+                <a:spcPts val="0"/>
+              </a:spcAft>
+            </a:pPr>
+            <a:r>
+              <a:rPr sz="1050" b="0" i="0">
+                <a:solidFill>
+                  <a:srgbClr val="B4C7D2"/>
+                </a:solidFill>
+                <a:latin typeface="Arial"/>
+              </a:rPr>
+              <a:t>0.3</a:t>
+            </a:r>
+          </a:p>
+        </p:txBody>
+      </p:sp>
+      <p:cxnSp>
+        <p:nvCxnSpPr>
+          <p:cNvPr id="55" name="C3-E02 line 53" descr="sci-ppt:o053"/>
+          <p:cNvCxnSpPr/>
+          <p:nvPr/>
+        </p:nvCxnSpPr>
+        <p:spPr>
+          <a:xfrm>
+            <a:off x="5696712" y="5029200"/>
+            <a:ext cx="64008" cy="0"/>
+          </a:xfrm>
+          <a:prstGeom prst="line">
+            <a:avLst/>
+          </a:prstGeom>
+          <a:ln w="12700">
+            <a:solidFill>
+              <a:srgbClr val="B4C7D2"/>
+            </a:solidFill>
+          </a:ln>
+          <a:effectLst/>
+        </p:spPr>
+      </p:cxnSp>
+      <p:cxnSp>
+        <p:nvCxnSpPr>
+          <p:cNvPr id="56" name="C3-E02 line 54" descr="sci-ppt:o054"/>
+          <p:cNvCxnSpPr/>
+          <p:nvPr/>
+        </p:nvCxnSpPr>
+        <p:spPr>
+          <a:xfrm>
+            <a:off x="5696712" y="4114800"/>
+            <a:ext cx="64008" cy="0"/>
+          </a:xfrm>
+          <a:prstGeom prst="line">
+            <a:avLst/>
+          </a:prstGeom>
+          <a:ln w="12700">
+            <a:solidFill>
+              <a:srgbClr val="B4C7D2"/>
+            </a:solidFill>
+          </a:ln>
+          <a:effectLst/>
+        </p:spPr>
+      </p:cxnSp>
+      <p:cxnSp>
+        <p:nvCxnSpPr>
+          <p:cNvPr id="57" name="C3-E02 line 55" descr="sci-ppt:o055"/>
+          <p:cNvCxnSpPr/>
+          <p:nvPr/>
+        </p:nvCxnSpPr>
+        <p:spPr>
+          <a:xfrm>
+            <a:off x="5760720" y="4114800"/>
+            <a:ext cx="5943600" cy="0"/>
+          </a:xfrm>
+          <a:prstGeom prst="line">
+            <a:avLst/>
+          </a:prstGeom>
+          <a:ln w="7620">
+            <a:solidFill>
+              <a:srgbClr val="2E4756"/>
+            </a:solidFill>
+          </a:ln>
+          <a:effectLst/>
+        </p:spPr>
+      </p:cxnSp>
+      <p:sp>
+        <p:nvSpPr>
+          <p:cNvPr id="58" name="C3-E02 text 56" descr="sci-ppt:o056"/>
+          <p:cNvSpPr txBox="1"/>
+          <p:nvPr/>
+        </p:nvSpPr>
+        <p:spPr>
+          <a:xfrm>
+            <a:off x="4892040" y="4032504"/>
+            <a:ext cx="777240" cy="208407"/>
+          </a:xfrm>
+          <a:prstGeom prst="rect">
+            <a:avLst/>
+          </a:prstGeom>
+          <a:noFill/>
+          <a:effectLst/>
+        </p:spPr>
+        <p:txBody>
+          <a:bodyPr wrap="none" lIns="18288" rIns="18288" tIns="18288" bIns="18288" anchor="t">
+            <a:spAutoFit/>
+          </a:bodyPr>
+          <a:lstStyle/>
+          <a:p>
+            <a:pPr algn="r">
+              <a:spcAft>
+                <a:spcPts val="0"/>
+              </a:spcAft>
+            </a:pPr>
+            <a:r>
+              <a:rPr sz="1050" b="0" i="0">
+                <a:solidFill>
+                  <a:srgbClr val="B4C7D2"/>
+                </a:solidFill>
+                <a:latin typeface="Arial"/>
+              </a:rPr>
+              <a:t>3</a:t>
+            </a:r>
+          </a:p>
+        </p:txBody>
+      </p:sp>
+      <p:cxnSp>
+        <p:nvCxnSpPr>
+          <p:cNvPr id="59" name="C3-E02 line 57" descr="sci-ppt:o057"/>
+          <p:cNvCxnSpPr/>
+          <p:nvPr/>
+        </p:nvCxnSpPr>
+        <p:spPr>
+          <a:xfrm>
+            <a:off x="5696712" y="3200400"/>
+            <a:ext cx="64008" cy="0"/>
+          </a:xfrm>
+          <a:prstGeom prst="line">
+            <a:avLst/>
+          </a:prstGeom>
+          <a:ln w="12700">
+            <a:solidFill>
+              <a:srgbClr val="B4C7D2"/>
+            </a:solidFill>
+          </a:ln>
+          <a:effectLst/>
+        </p:spPr>
+      </p:cxnSp>
+      <p:cxnSp>
+        <p:nvCxnSpPr>
+          <p:cNvPr id="60" name="C3-E02 line 58" descr="sci-ppt:o058"/>
+          <p:cNvCxnSpPr/>
+          <p:nvPr/>
+        </p:nvCxnSpPr>
+        <p:spPr>
+          <a:xfrm>
+            <a:off x="5760720" y="3200400"/>
+            <a:ext cx="5943600" cy="0"/>
+          </a:xfrm>
+          <a:prstGeom prst="line">
+            <a:avLst/>
+          </a:prstGeom>
+          <a:ln w="7620">
+            <a:solidFill>
+              <a:srgbClr val="2E4756"/>
+            </a:solidFill>
+          </a:ln>
+          <a:effectLst/>
+        </p:spPr>
+      </p:cxnSp>
+      <p:sp>
+        <p:nvSpPr>
+          <p:cNvPr id="61" name="C3-E02 text 59" descr="sci-ppt:o059"/>
+          <p:cNvSpPr txBox="1"/>
+          <p:nvPr/>
+        </p:nvSpPr>
+        <p:spPr>
+          <a:xfrm>
+            <a:off x="4892040" y="3118104"/>
+            <a:ext cx="777240" cy="208407"/>
+          </a:xfrm>
+          <a:prstGeom prst="rect">
+            <a:avLst/>
+          </a:prstGeom>
+          <a:noFill/>
+          <a:effectLst/>
+        </p:spPr>
+        <p:txBody>
+          <a:bodyPr wrap="none" lIns="18288" rIns="18288" tIns="18288" bIns="18288" anchor="t">
+            <a:spAutoFit/>
+          </a:bodyPr>
+          <a:lstStyle/>
+          <a:p>
+            <a:pPr algn="r">
+              <a:spcAft>
+                <a:spcPts val="0"/>
+              </a:spcAft>
+            </a:pPr>
+            <a:r>
+              <a:rPr sz="1050" b="0" i="0">
+                <a:solidFill>
+                  <a:srgbClr val="B4C7D2"/>
+                </a:solidFill>
+                <a:latin typeface="Arial"/>
+              </a:rPr>
+              <a:t>6</a:t>
+            </a:r>
+          </a:p>
+        </p:txBody>
+      </p:sp>
+      <p:cxnSp>
+        <p:nvCxnSpPr>
+          <p:cNvPr id="62" name="C3-E02 line 60" descr="sci-ppt:o060"/>
+          <p:cNvCxnSpPr/>
+          <p:nvPr/>
+        </p:nvCxnSpPr>
+        <p:spPr>
+          <a:xfrm>
+            <a:off x="5696712" y="2286000"/>
+            <a:ext cx="64008" cy="0"/>
+          </a:xfrm>
+          <a:prstGeom prst="line">
+            <a:avLst/>
+          </a:prstGeom>
+          <a:ln w="12700">
+            <a:solidFill>
+              <a:srgbClr val="B4C7D2"/>
+            </a:solidFill>
+          </a:ln>
+          <a:effectLst/>
+        </p:spPr>
+      </p:cxnSp>
+      <p:cxnSp>
+        <p:nvCxnSpPr>
+          <p:cNvPr id="63" name="C3-E02 line 61" descr="sci-ppt:o061"/>
+          <p:cNvCxnSpPr/>
+          <p:nvPr/>
+        </p:nvCxnSpPr>
+        <p:spPr>
+          <a:xfrm>
+            <a:off x="5760720" y="2286000"/>
+            <a:ext cx="5943600" cy="0"/>
+          </a:xfrm>
+          <a:prstGeom prst="line">
+            <a:avLst/>
+          </a:prstGeom>
+          <a:ln w="7620">
+            <a:solidFill>
+              <a:srgbClr val="2E4756"/>
+            </a:solidFill>
+          </a:ln>
+          <a:effectLst/>
+        </p:spPr>
+      </p:cxnSp>
+      <p:sp>
+        <p:nvSpPr>
+          <p:cNvPr id="64" name="C3-E02 text 62" descr="sci-ppt:o062"/>
+          <p:cNvSpPr txBox="1"/>
+          <p:nvPr/>
+        </p:nvSpPr>
+        <p:spPr>
+          <a:xfrm>
+            <a:off x="4892040" y="2203704"/>
+            <a:ext cx="777240" cy="208407"/>
+          </a:xfrm>
+          <a:prstGeom prst="rect">
+            <a:avLst/>
+          </a:prstGeom>
+          <a:noFill/>
+          <a:effectLst/>
+        </p:spPr>
+        <p:txBody>
+          <a:bodyPr wrap="none" lIns="18288" rIns="18288" tIns="18288" bIns="18288" anchor="t">
+            <a:spAutoFit/>
+          </a:bodyPr>
+          <a:lstStyle/>
+          <a:p>
+            <a:pPr algn="r">
+              <a:spcAft>
+                <a:spcPts val="0"/>
+              </a:spcAft>
+            </a:pPr>
+            <a:r>
+              <a:rPr sz="1050" b="0" i="0">
+                <a:solidFill>
+                  <a:srgbClr val="B4C7D2"/>
+                </a:solidFill>
+                <a:latin typeface="Arial"/>
+              </a:rPr>
+              <a:t>9</a:t>
+            </a:r>
+          </a:p>
+        </p:txBody>
+      </p:sp>
+      <p:cxnSp>
+        <p:nvCxnSpPr>
+          <p:cNvPr id="65" name="C3-E02 line 63" descr="sci-ppt:o063"/>
+          <p:cNvCxnSpPr/>
+          <p:nvPr/>
+        </p:nvCxnSpPr>
+        <p:spPr>
+          <a:xfrm>
+            <a:off x="5696712" y="1371600"/>
+            <a:ext cx="64008" cy="0"/>
+          </a:xfrm>
+          <a:prstGeom prst="line">
+            <a:avLst/>
+          </a:prstGeom>
+          <a:ln w="12700">
+            <a:solidFill>
+              <a:srgbClr val="B4C7D2"/>
+            </a:solidFill>
+          </a:ln>
+          <a:effectLst/>
+        </p:spPr>
+      </p:cxnSp>
+      <p:cxnSp>
+        <p:nvCxnSpPr>
+          <p:cNvPr id="66" name="C3-E02 line 64" descr="sci-ppt:o064"/>
+          <p:cNvCxnSpPr/>
+          <p:nvPr/>
+        </p:nvCxnSpPr>
+        <p:spPr>
+          <a:xfrm>
+            <a:off x="5760720" y="1371600"/>
+            <a:ext cx="5943600" cy="0"/>
+          </a:xfrm>
+          <a:prstGeom prst="line">
+            <a:avLst/>
+          </a:prstGeom>
+          <a:ln w="7620">
+            <a:solidFill>
+              <a:srgbClr val="2E4756"/>
+            </a:solidFill>
+          </a:ln>
+          <a:effectLst/>
+        </p:spPr>
+      </p:cxnSp>
+      <p:sp>
+        <p:nvSpPr>
+          <p:cNvPr id="67" name="C3-E02 text 65" descr="sci-ppt:o065"/>
+          <p:cNvSpPr txBox="1"/>
+          <p:nvPr/>
+        </p:nvSpPr>
+        <p:spPr>
+          <a:xfrm>
+            <a:off x="4892040" y="1289304"/>
+            <a:ext cx="777240" cy="208407"/>
+          </a:xfrm>
+          <a:prstGeom prst="rect">
+            <a:avLst/>
+          </a:prstGeom>
+          <a:noFill/>
+          <a:effectLst/>
+        </p:spPr>
+        <p:txBody>
+          <a:bodyPr wrap="none" lIns="18288" rIns="18288" tIns="18288" bIns="18288" anchor="t">
+            <a:spAutoFit/>
+          </a:bodyPr>
+          <a:lstStyle/>
+          <a:p>
+            <a:pPr algn="r">
+              <a:spcAft>
+                <a:spcPts val="0"/>
+              </a:spcAft>
+            </a:pPr>
+            <a:r>
+              <a:rPr sz="1050" b="0" i="0">
+                <a:solidFill>
+                  <a:srgbClr val="B4C7D2"/>
+                </a:solidFill>
+                <a:latin typeface="Arial"/>
+              </a:rPr>
+              <a:t>12</a:t>
+            </a:r>
+          </a:p>
+        </p:txBody>
+      </p:sp>
+      <p:sp>
+        <p:nvSpPr>
+          <p:cNvPr id="68" name="C3-E02 text 66" descr="sci-ppt:o066"/>
+          <p:cNvSpPr txBox="1"/>
+          <p:nvPr/>
+        </p:nvSpPr>
+        <p:spPr>
+          <a:xfrm>
+            <a:off x="5760720" y="5312664"/>
+            <a:ext cx="5943600" cy="231648"/>
+          </a:xfrm>
+          <a:prstGeom prst="rect">
+            <a:avLst/>
+          </a:prstGeom>
+          <a:noFill/>
+          <a:effectLst/>
+        </p:spPr>
+        <p:txBody>
+          <a:bodyPr wrap="none" lIns="18288" rIns="18288" tIns="18288" bIns="18288" anchor="t">
+            <a:spAutoFit/>
+          </a:bodyPr>
+          <a:lstStyle/>
+          <a:p>
+            <a:pPr algn="ctr">
+              <a:spcAft>
+                <a:spcPts val="0"/>
+              </a:spcAft>
+            </a:pPr>
+            <a:r>
+              <a:rPr sz="1200" b="0" i="0">
+                <a:solidFill>
+                  <a:srgbClr val="E7F0F3"/>
+                </a:solidFill>
+                <a:latin typeface="Arial"/>
+              </a:rPr>
+              <a:t>allowed edge decrease ε</a:t>
+            </a:r>
+          </a:p>
+        </p:txBody>
+      </p:sp>
+      <p:sp>
+        <p:nvSpPr>
+          <p:cNvPr id="69" name="C3-E02 text 67" descr="sci-ppt:o067"/>
+          <p:cNvSpPr txBox="1"/>
+          <p:nvPr/>
+        </p:nvSpPr>
+        <p:spPr>
+          <a:xfrm>
+            <a:off x="5212080" y="1024128"/>
+            <a:ext cx="5943600" cy="231648"/>
+          </a:xfrm>
+          <a:prstGeom prst="rect">
+            <a:avLst/>
+          </a:prstGeom>
+          <a:noFill/>
+          <a:effectLst/>
+        </p:spPr>
+        <p:txBody>
+          <a:bodyPr wrap="none" lIns="18288" rIns="18288" tIns="18288" bIns="18288" anchor="t">
             <a:spAutoFit/>
           </a:bodyPr>
           <a:lstStyle/>
@@ -3249,51 +5291,688 @@
               </a:spcAft>
             </a:pPr>
             <a:r>
-              <a:rPr sz="1800" b="0" i="0">
+              <a:rPr sz="1200" b="0" i="0">
                 <a:solidFill>
                   <a:srgbClr val="E7F0F3"/>
                 </a:solidFill>
                 <a:latin typeface="Arial"/>
               </a:rPr>
-              <a:t>w</a:t>
-            </a:r>
-          </a:p>
-        </p:txBody>
-      </p:sp>
-      <p:cxnSp>
-        <p:nvCxnSpPr>
-          <p:cNvPr id="7" name="C3-E02 arrow 5" descr="sci-ppt:o005"/>
-          <p:cNvCxnSpPr/>
-          <p:nvPr/>
-        </p:nvCxnSpPr>
-        <p:spPr>
-          <a:xfrm flipV="1">
-            <a:off x="3108960" y="1600200"/>
-            <a:ext cx="0" cy="594360"/>
-          </a:xfrm>
-          <a:prstGeom prst="line">
-            <a:avLst/>
-          </a:prstGeom>
-          <a:ln w="25400">
+              <a:t>required beam radius  w / R_A</a:t>
+            </a:r>
+          </a:p>
+        </p:txBody>
+      </p:sp>
+      <p:sp>
+        <p:nvSpPr>
+          <p:cNvPr id="70" name="C3-E02 polygon 68" descr="sci-ppt:o068"/>
+          <p:cNvSpPr/>
+          <p:nvPr/>
+        </p:nvSpPr>
+        <p:spPr>
+          <a:xfrm>
+            <a:off x="6045455" y="1446556"/>
+            <a:ext cx="5658865" cy="2860882"/>
+          </a:xfrm>
+          <a:custGeom>
+            <a:avLst/>
+            <a:gdLst/>
+            <a:ahLst/>
+            <a:cxnLst/>
+            <a:rect l="l" t="t" r="r" b="b"/>
+            <a:pathLst>
+              <a:path w="5658865" h="2860882">
+                <a:moveTo>
+                  <a:pt x="0" y="0"/>
+                </a:moveTo>
+                <a:lnTo>
+                  <a:pt x="28872" y="170155"/>
+                </a:lnTo>
+                <a:lnTo>
+                  <a:pt x="57743" y="318368"/>
+                </a:lnTo>
+                <a:lnTo>
+                  <a:pt x="86615" y="448990"/>
+                </a:lnTo>
+                <a:lnTo>
+                  <a:pt x="115487" y="565253"/>
+                </a:lnTo>
+                <a:lnTo>
+                  <a:pt x="144359" y="669614"/>
+                </a:lnTo>
+                <a:lnTo>
+                  <a:pt x="173230" y="763979"/>
+                </a:lnTo>
+                <a:lnTo>
+                  <a:pt x="202102" y="849853"/>
+                </a:lnTo>
+                <a:lnTo>
+                  <a:pt x="230974" y="928440"/>
+                </a:lnTo>
+                <a:lnTo>
+                  <a:pt x="259846" y="1000718"/>
+                </a:lnTo>
+                <a:lnTo>
+                  <a:pt x="288717" y="1067493"/>
+                </a:lnTo>
+                <a:lnTo>
+                  <a:pt x="317589" y="1129430"/>
+                </a:lnTo>
+                <a:lnTo>
+                  <a:pt x="346461" y="1187089"/>
+                </a:lnTo>
+                <a:lnTo>
+                  <a:pt x="375333" y="1240944"/>
+                </a:lnTo>
+                <a:lnTo>
+                  <a:pt x="404204" y="1291396"/>
+                </a:lnTo>
+                <a:lnTo>
+                  <a:pt x="433076" y="1338790"/>
+                </a:lnTo>
+                <a:lnTo>
+                  <a:pt x="461948" y="1383426"/>
+                </a:lnTo>
+                <a:lnTo>
+                  <a:pt x="490820" y="1425562"/>
+                </a:lnTo>
+                <a:lnTo>
+                  <a:pt x="519691" y="1465424"/>
+                </a:lnTo>
+                <a:lnTo>
+                  <a:pt x="548563" y="1503210"/>
+                </a:lnTo>
+                <a:lnTo>
+                  <a:pt x="577435" y="1539096"/>
+                </a:lnTo>
+                <a:lnTo>
+                  <a:pt x="606307" y="1573237"/>
+                </a:lnTo>
+                <a:lnTo>
+                  <a:pt x="635178" y="1605770"/>
+                </a:lnTo>
+                <a:lnTo>
+                  <a:pt x="664050" y="1636819"/>
+                </a:lnTo>
+                <a:lnTo>
+                  <a:pt x="692922" y="1666494"/>
+                </a:lnTo>
+                <a:lnTo>
+                  <a:pt x="721794" y="1694893"/>
+                </a:lnTo>
+                <a:lnTo>
+                  <a:pt x="750666" y="1722108"/>
+                </a:lnTo>
+                <a:lnTo>
+                  <a:pt x="779537" y="1748217"/>
+                </a:lnTo>
+                <a:lnTo>
+                  <a:pt x="808409" y="1773295"/>
+                </a:lnTo>
+                <a:lnTo>
+                  <a:pt x="837281" y="1797408"/>
+                </a:lnTo>
+                <a:lnTo>
+                  <a:pt x="866153" y="1820618"/>
+                </a:lnTo>
+                <a:lnTo>
+                  <a:pt x="895024" y="1842979"/>
+                </a:lnTo>
+                <a:lnTo>
+                  <a:pt x="923896" y="1864542"/>
+                </a:lnTo>
+                <a:lnTo>
+                  <a:pt x="952768" y="1885355"/>
+                </a:lnTo>
+                <a:lnTo>
+                  <a:pt x="981640" y="1905460"/>
+                </a:lnTo>
+                <a:lnTo>
+                  <a:pt x="1010511" y="1924896"/>
+                </a:lnTo>
+                <a:lnTo>
+                  <a:pt x="1039383" y="1943701"/>
+                </a:lnTo>
+                <a:lnTo>
+                  <a:pt x="1068255" y="1961908"/>
+                </a:lnTo>
+                <a:lnTo>
+                  <a:pt x="1097127" y="1979549"/>
+                </a:lnTo>
+                <a:lnTo>
+                  <a:pt x="1125998" y="1996652"/>
+                </a:lnTo>
+                <a:lnTo>
+                  <a:pt x="1154870" y="2013245"/>
+                </a:lnTo>
+                <a:lnTo>
+                  <a:pt x="1183742" y="2029353"/>
+                </a:lnTo>
+                <a:lnTo>
+                  <a:pt x="1212614" y="2044999"/>
+                </a:lnTo>
+                <a:lnTo>
+                  <a:pt x="1241485" y="2060205"/>
+                </a:lnTo>
+                <a:lnTo>
+                  <a:pt x="1270357" y="2074991"/>
+                </a:lnTo>
+                <a:lnTo>
+                  <a:pt x="1299229" y="2089378"/>
+                </a:lnTo>
+                <a:lnTo>
+                  <a:pt x="1328101" y="2103382"/>
+                </a:lnTo>
+                <a:lnTo>
+                  <a:pt x="1356972" y="2117021"/>
+                </a:lnTo>
+                <a:lnTo>
+                  <a:pt x="1385844" y="2130310"/>
+                </a:lnTo>
+                <a:lnTo>
+                  <a:pt x="1414716" y="2143264"/>
+                </a:lnTo>
+                <a:lnTo>
+                  <a:pt x="1443588" y="2155898"/>
+                </a:lnTo>
+                <a:lnTo>
+                  <a:pt x="1472459" y="2168224"/>
+                </a:lnTo>
+                <a:lnTo>
+                  <a:pt x="1501331" y="2180255"/>
+                </a:lnTo>
+                <a:lnTo>
+                  <a:pt x="1530203" y="2192003"/>
+                </a:lnTo>
+                <a:lnTo>
+                  <a:pt x="1559075" y="2203478"/>
+                </a:lnTo>
+                <a:lnTo>
+                  <a:pt x="1587947" y="2214692"/>
+                </a:lnTo>
+                <a:lnTo>
+                  <a:pt x="1616818" y="2225654"/>
+                </a:lnTo>
+                <a:lnTo>
+                  <a:pt x="1645690" y="2236374"/>
+                </a:lnTo>
+                <a:lnTo>
+                  <a:pt x="1674562" y="2246860"/>
+                </a:lnTo>
+                <a:lnTo>
+                  <a:pt x="1703434" y="2257122"/>
+                </a:lnTo>
+                <a:lnTo>
+                  <a:pt x="1732305" y="2267167"/>
+                </a:lnTo>
+                <a:lnTo>
+                  <a:pt x="1761177" y="2277002"/>
+                </a:lnTo>
+                <a:lnTo>
+                  <a:pt x="1790049" y="2286636"/>
+                </a:lnTo>
+                <a:lnTo>
+                  <a:pt x="1818921" y="2296074"/>
+                </a:lnTo>
+                <a:lnTo>
+                  <a:pt x="1847792" y="2305325"/>
+                </a:lnTo>
+                <a:lnTo>
+                  <a:pt x="1876664" y="2314393"/>
+                </a:lnTo>
+                <a:lnTo>
+                  <a:pt x="1905536" y="2323285"/>
+                </a:lnTo>
+                <a:lnTo>
+                  <a:pt x="1934408" y="2332007"/>
+                </a:lnTo>
+                <a:lnTo>
+                  <a:pt x="1963279" y="2340564"/>
+                </a:lnTo>
+                <a:lnTo>
+                  <a:pt x="1992151" y="2348961"/>
+                </a:lnTo>
+                <a:lnTo>
+                  <a:pt x="2021023" y="2357204"/>
+                </a:lnTo>
+                <a:lnTo>
+                  <a:pt x="2049895" y="2365297"/>
+                </a:lnTo>
+                <a:lnTo>
+                  <a:pt x="2078766" y="2373245"/>
+                </a:lnTo>
+                <a:lnTo>
+                  <a:pt x="2107638" y="2381051"/>
+                </a:lnTo>
+                <a:lnTo>
+                  <a:pt x="2136510" y="2388722"/>
+                </a:lnTo>
+                <a:lnTo>
+                  <a:pt x="2165382" y="2396259"/>
+                </a:lnTo>
+                <a:lnTo>
+                  <a:pt x="2194253" y="2403668"/>
+                </a:lnTo>
+                <a:lnTo>
+                  <a:pt x="2223125" y="2410951"/>
+                </a:lnTo>
+                <a:lnTo>
+                  <a:pt x="2251997" y="2418113"/>
+                </a:lnTo>
+                <a:lnTo>
+                  <a:pt x="2280869" y="2425157"/>
+                </a:lnTo>
+                <a:lnTo>
+                  <a:pt x="2309740" y="2432087"/>
+                </a:lnTo>
+                <a:lnTo>
+                  <a:pt x="2338612" y="2438904"/>
+                </a:lnTo>
+                <a:lnTo>
+                  <a:pt x="2367484" y="2445613"/>
+                </a:lnTo>
+                <a:lnTo>
+                  <a:pt x="2396356" y="2452216"/>
+                </a:lnTo>
+                <a:lnTo>
+                  <a:pt x="2425228" y="2458717"/>
+                </a:lnTo>
+                <a:lnTo>
+                  <a:pt x="2454099" y="2465117"/>
+                </a:lnTo>
+                <a:lnTo>
+                  <a:pt x="2482971" y="2471420"/>
+                </a:lnTo>
+                <a:lnTo>
+                  <a:pt x="2511843" y="2477627"/>
+                </a:lnTo>
+                <a:lnTo>
+                  <a:pt x="2540715" y="2483742"/>
+                </a:lnTo>
+                <a:lnTo>
+                  <a:pt x="2569586" y="2489767"/>
+                </a:lnTo>
+                <a:lnTo>
+                  <a:pt x="2598458" y="2495704"/>
+                </a:lnTo>
+                <a:lnTo>
+                  <a:pt x="2627330" y="2501555"/>
+                </a:lnTo>
+                <a:lnTo>
+                  <a:pt x="2656202" y="2507322"/>
+                </a:lnTo>
+                <a:lnTo>
+                  <a:pt x="2685073" y="2513007"/>
+                </a:lnTo>
+                <a:lnTo>
+                  <a:pt x="2713945" y="2518613"/>
+                </a:lnTo>
+                <a:lnTo>
+                  <a:pt x="2742817" y="2524141"/>
+                </a:lnTo>
+                <a:lnTo>
+                  <a:pt x="2771689" y="2529593"/>
+                </a:lnTo>
+                <a:lnTo>
+                  <a:pt x="2800560" y="2534971"/>
+                </a:lnTo>
+                <a:lnTo>
+                  <a:pt x="2829432" y="2540277"/>
+                </a:lnTo>
+                <a:lnTo>
+                  <a:pt x="2858304" y="2545511"/>
+                </a:lnTo>
+                <a:lnTo>
+                  <a:pt x="2887176" y="2550677"/>
+                </a:lnTo>
+                <a:lnTo>
+                  <a:pt x="2916047" y="2555774"/>
+                </a:lnTo>
+                <a:lnTo>
+                  <a:pt x="2944919" y="2560806"/>
+                </a:lnTo>
+                <a:lnTo>
+                  <a:pt x="2973791" y="2565773"/>
+                </a:lnTo>
+                <a:lnTo>
+                  <a:pt x="3002663" y="2570676"/>
+                </a:lnTo>
+                <a:lnTo>
+                  <a:pt x="3031534" y="2575518"/>
+                </a:lnTo>
+                <a:lnTo>
+                  <a:pt x="3060406" y="2580299"/>
+                </a:lnTo>
+                <a:lnTo>
+                  <a:pt x="3089278" y="2585021"/>
+                </a:lnTo>
+                <a:lnTo>
+                  <a:pt x="3118150" y="2589685"/>
+                </a:lnTo>
+                <a:lnTo>
+                  <a:pt x="3147021" y="2594293"/>
+                </a:lnTo>
+                <a:lnTo>
+                  <a:pt x="3175893" y="2598844"/>
+                </a:lnTo>
+                <a:lnTo>
+                  <a:pt x="3204765" y="2603342"/>
+                </a:lnTo>
+                <a:lnTo>
+                  <a:pt x="3233637" y="2607786"/>
+                </a:lnTo>
+                <a:lnTo>
+                  <a:pt x="3262509" y="2612177"/>
+                </a:lnTo>
+                <a:lnTo>
+                  <a:pt x="3291380" y="2616518"/>
+                </a:lnTo>
+                <a:lnTo>
+                  <a:pt x="3320252" y="2620808"/>
+                </a:lnTo>
+                <a:lnTo>
+                  <a:pt x="3349124" y="2625049"/>
+                </a:lnTo>
+                <a:lnTo>
+                  <a:pt x="3377996" y="2629242"/>
+                </a:lnTo>
+                <a:lnTo>
+                  <a:pt x="3406867" y="2633388"/>
+                </a:lnTo>
+                <a:lnTo>
+                  <a:pt x="3435739" y="2637488"/>
+                </a:lnTo>
+                <a:lnTo>
+                  <a:pt x="3464611" y="2641542"/>
+                </a:lnTo>
+                <a:lnTo>
+                  <a:pt x="3493483" y="2645551"/>
+                </a:lnTo>
+                <a:lnTo>
+                  <a:pt x="3522354" y="2649517"/>
+                </a:lnTo>
+                <a:lnTo>
+                  <a:pt x="3551226" y="2653440"/>
+                </a:lnTo>
+                <a:lnTo>
+                  <a:pt x="3580098" y="2657320"/>
+                </a:lnTo>
+                <a:lnTo>
+                  <a:pt x="3608970" y="2661160"/>
+                </a:lnTo>
+                <a:lnTo>
+                  <a:pt x="3637841" y="2664959"/>
+                </a:lnTo>
+                <a:lnTo>
+                  <a:pt x="3666713" y="2668718"/>
+                </a:lnTo>
+                <a:lnTo>
+                  <a:pt x="3695585" y="2672438"/>
+                </a:lnTo>
+                <a:lnTo>
+                  <a:pt x="3724457" y="2676119"/>
+                </a:lnTo>
+                <a:lnTo>
+                  <a:pt x="3753328" y="2679763"/>
+                </a:lnTo>
+                <a:lnTo>
+                  <a:pt x="3782200" y="2683370"/>
+                </a:lnTo>
+                <a:lnTo>
+                  <a:pt x="3811072" y="2686940"/>
+                </a:lnTo>
+                <a:lnTo>
+                  <a:pt x="3839944" y="2690475"/>
+                </a:lnTo>
+                <a:lnTo>
+                  <a:pt x="3868815" y="2693974"/>
+                </a:lnTo>
+                <a:lnTo>
+                  <a:pt x="3897687" y="2697439"/>
+                </a:lnTo>
+                <a:lnTo>
+                  <a:pt x="3926559" y="2700871"/>
+                </a:lnTo>
+                <a:lnTo>
+                  <a:pt x="3955431" y="2704268"/>
+                </a:lnTo>
+                <a:lnTo>
+                  <a:pt x="3984302" y="2707633"/>
+                </a:lnTo>
+                <a:lnTo>
+                  <a:pt x="4013174" y="2710966"/>
+                </a:lnTo>
+                <a:lnTo>
+                  <a:pt x="4042046" y="2714267"/>
+                </a:lnTo>
+                <a:lnTo>
+                  <a:pt x="4070918" y="2717537"/>
+                </a:lnTo>
+                <a:lnTo>
+                  <a:pt x="4099790" y="2720776"/>
+                </a:lnTo>
+                <a:lnTo>
+                  <a:pt x="4128661" y="2723986"/>
+                </a:lnTo>
+                <a:lnTo>
+                  <a:pt x="4157533" y="2727165"/>
+                </a:lnTo>
+                <a:lnTo>
+                  <a:pt x="4186405" y="2730315"/>
+                </a:lnTo>
+                <a:lnTo>
+                  <a:pt x="4215277" y="2733437"/>
+                </a:lnTo>
+                <a:lnTo>
+                  <a:pt x="4244148" y="2736530"/>
+                </a:lnTo>
+                <a:lnTo>
+                  <a:pt x="4273020" y="2739596"/>
+                </a:lnTo>
+                <a:lnTo>
+                  <a:pt x="4301892" y="2742634"/>
+                </a:lnTo>
+                <a:lnTo>
+                  <a:pt x="4330764" y="2745645"/>
+                </a:lnTo>
+                <a:lnTo>
+                  <a:pt x="4359635" y="2748630"/>
+                </a:lnTo>
+                <a:lnTo>
+                  <a:pt x="4388507" y="2751588"/>
+                </a:lnTo>
+                <a:lnTo>
+                  <a:pt x="4417379" y="2754521"/>
+                </a:lnTo>
+                <a:lnTo>
+                  <a:pt x="4446251" y="2757429"/>
+                </a:lnTo>
+                <a:lnTo>
+                  <a:pt x="4475122" y="2760311"/>
+                </a:lnTo>
+                <a:lnTo>
+                  <a:pt x="4503994" y="2763169"/>
+                </a:lnTo>
+                <a:lnTo>
+                  <a:pt x="4532866" y="2766003"/>
+                </a:lnTo>
+                <a:lnTo>
+                  <a:pt x="4561738" y="2768813"/>
+                </a:lnTo>
+                <a:lnTo>
+                  <a:pt x="4590609" y="2771600"/>
+                </a:lnTo>
+                <a:lnTo>
+                  <a:pt x="4619481" y="2774364"/>
+                </a:lnTo>
+                <a:lnTo>
+                  <a:pt x="4648353" y="2777104"/>
+                </a:lnTo>
+                <a:lnTo>
+                  <a:pt x="4677225" y="2779822"/>
+                </a:lnTo>
+                <a:lnTo>
+                  <a:pt x="4706096" y="2782519"/>
+                </a:lnTo>
+                <a:lnTo>
+                  <a:pt x="4734968" y="2785193"/>
+                </a:lnTo>
+                <a:lnTo>
+                  <a:pt x="4763840" y="2787846"/>
+                </a:lnTo>
+                <a:lnTo>
+                  <a:pt x="4792712" y="2790477"/>
+                </a:lnTo>
+                <a:lnTo>
+                  <a:pt x="4821583" y="2793088"/>
+                </a:lnTo>
+                <a:lnTo>
+                  <a:pt x="4850455" y="2795678"/>
+                </a:lnTo>
+                <a:lnTo>
+                  <a:pt x="4879327" y="2798248"/>
+                </a:lnTo>
+                <a:lnTo>
+                  <a:pt x="4908199" y="2800798"/>
+                </a:lnTo>
+                <a:lnTo>
+                  <a:pt x="4937071" y="2803328"/>
+                </a:lnTo>
+                <a:lnTo>
+                  <a:pt x="4965942" y="2805839"/>
+                </a:lnTo>
+                <a:lnTo>
+                  <a:pt x="4994814" y="2808330"/>
+                </a:lnTo>
+                <a:lnTo>
+                  <a:pt x="5023686" y="2810803"/>
+                </a:lnTo>
+                <a:lnTo>
+                  <a:pt x="5052558" y="2813257"/>
+                </a:lnTo>
+                <a:lnTo>
+                  <a:pt x="5081429" y="2815692"/>
+                </a:lnTo>
+                <a:lnTo>
+                  <a:pt x="5110301" y="2818110"/>
+                </a:lnTo>
+                <a:lnTo>
+                  <a:pt x="5139173" y="2820509"/>
+                </a:lnTo>
+                <a:lnTo>
+                  <a:pt x="5168045" y="2822890"/>
+                </a:lnTo>
+                <a:lnTo>
+                  <a:pt x="5196916" y="2825255"/>
+                </a:lnTo>
+                <a:lnTo>
+                  <a:pt x="5225788" y="2827602"/>
+                </a:lnTo>
+                <a:lnTo>
+                  <a:pt x="5254660" y="2829931"/>
+                </a:lnTo>
+                <a:lnTo>
+                  <a:pt x="5283532" y="2832245"/>
+                </a:lnTo>
+                <a:lnTo>
+                  <a:pt x="5312403" y="2834541"/>
+                </a:lnTo>
+                <a:lnTo>
+                  <a:pt x="5341275" y="2836821"/>
+                </a:lnTo>
+                <a:lnTo>
+                  <a:pt x="5370147" y="2839085"/>
+                </a:lnTo>
+                <a:lnTo>
+                  <a:pt x="5399019" y="2841334"/>
+                </a:lnTo>
+                <a:lnTo>
+                  <a:pt x="5427890" y="2843566"/>
+                </a:lnTo>
+                <a:lnTo>
+                  <a:pt x="5456762" y="2845783"/>
+                </a:lnTo>
+                <a:lnTo>
+                  <a:pt x="5485634" y="2847984"/>
+                </a:lnTo>
+                <a:lnTo>
+                  <a:pt x="5514506" y="2850171"/>
+                </a:lnTo>
+                <a:lnTo>
+                  <a:pt x="5543377" y="2852342"/>
+                </a:lnTo>
+                <a:lnTo>
+                  <a:pt x="5572249" y="2854499"/>
+                </a:lnTo>
+                <a:lnTo>
+                  <a:pt x="5601121" y="2856641"/>
+                </a:lnTo>
+                <a:lnTo>
+                  <a:pt x="5629993" y="2858769"/>
+                </a:lnTo>
+                <a:lnTo>
+                  <a:pt x="5658865" y="2860882"/>
+                </a:lnTo>
+              </a:path>
+            </a:pathLst>
+          </a:custGeom>
+          <a:noFill/>
+          <a:ln w="38100">
             <a:solidFill>
               <a:srgbClr val="8EDBD4"/>
             </a:solidFill>
-            <a:headEnd type="none" w="med" len="med"/>
-            <a:tailEnd type="triangle" w="med" len="med"/>
           </a:ln>
           <a:effectLst/>
         </p:spPr>
-      </p:cxnSp>
-      <p:sp>
-        <p:nvSpPr>
-          <p:cNvPr id="8" name="C3-E02 text 6" descr="sci-ppt:o006"/>
+        <p:txBody>
+          <a:bodyPr rtlCol="0" anchor="ctr"/>
+          <a:lstStyle/>
+          <a:p>
+            <a:pPr algn="ctr"/>
+          </a:p>
+        </p:txBody>
+      </p:sp>
+      <p:sp>
+        <p:nvSpPr>
+          <p:cNvPr id="71" name="C3-E02 ellipse 69" descr="sci-ppt:o069"/>
+          <p:cNvSpPr/>
+          <p:nvPr/>
+        </p:nvSpPr>
+        <p:spPr>
+          <a:xfrm>
+            <a:off x="7668768" y="3628069"/>
+            <a:ext cx="146304" cy="146304"/>
+          </a:xfrm>
+          <a:prstGeom prst="ellipse">
+            <a:avLst/>
+          </a:prstGeom>
+          <a:solidFill>
+            <a:srgbClr val="F2B880"/>
+          </a:solidFill>
+          <a:ln w="12700">
+            <a:solidFill>
+              <a:srgbClr val="F2B880"/>
+            </a:solidFill>
+          </a:ln>
+          <a:effectLst/>
+        </p:spPr>
+        <p:txBody>
+          <a:bodyPr rtlCol="0" anchor="ctr"/>
+          <a:lstStyle/>
+          <a:p>
+            <a:pPr algn="ctr"/>
+          </a:p>
+        </p:txBody>
+      </p:sp>
+      <p:sp>
+        <p:nvSpPr>
+          <p:cNvPr id="72" name="C3-E02 text 70" descr="sci-ppt:o070"/>
           <p:cNvSpPr txBox="1"/>
           <p:nvPr/>
         </p:nvSpPr>
         <p:spPr>
           <a:xfrm>
-            <a:off x="2148840" y="1508760"/>
-            <a:ext cx="1828800" cy="365760"/>
+            <a:off x="7851647" y="3609781"/>
+            <a:ext cx="2194560" cy="231648"/>
           </a:xfrm>
           <a:prstGeom prst="rect">
             <a:avLst/>
@@ -3302,7 +5981,7 @@
           <a:effectLst/>
         </p:spPr>
         <p:txBody>
-          <a:bodyPr wrap="square" lIns="27432" rIns="27432" tIns="18288" bIns="18288" anchor="ctr">
+          <a:bodyPr wrap="none" lIns="18288" rIns="18288" tIns="18288" bIns="18288" anchor="t">
             <a:spAutoFit/>
           </a:bodyPr>
           <a:lstStyle/>
@@ -3313,39 +5992,199 @@
               </a:spcAft>
             </a:pPr>
             <a:r>
-              <a:rPr sz="1700" b="0" i="0">
+              <a:rPr sz="1200" b="0" i="0">
+                <a:solidFill>
+                  <a:srgbClr val="F2B880"/>
+                </a:solidFill>
+                <a:latin typeface="Arial"/>
+              </a:rPr>
+              <a:t>ε = 0.1: w ≥ 4.36 R_A</a:t>
+            </a:r>
+          </a:p>
+        </p:txBody>
+      </p:sp>
+      <p:sp>
+        <p:nvSpPr>
+          <p:cNvPr id="73" name="C3-E02 ellipse 71" descr="sci-ppt:o071"/>
+          <p:cNvSpPr/>
+          <p:nvPr/>
+        </p:nvSpPr>
+        <p:spPr>
+          <a:xfrm>
+            <a:off x="6678167" y="3052781"/>
+            <a:ext cx="146304" cy="146304"/>
+          </a:xfrm>
+          <a:prstGeom prst="ellipse">
+            <a:avLst/>
+          </a:prstGeom>
+          <a:solidFill>
+            <a:srgbClr val="7FC8F8"/>
+          </a:solidFill>
+          <a:ln w="12700">
+            <a:solidFill>
+              <a:srgbClr val="7FC8F8"/>
+            </a:solidFill>
+          </a:ln>
+          <a:effectLst/>
+        </p:spPr>
+        <p:txBody>
+          <a:bodyPr rtlCol="0" anchor="ctr"/>
+          <a:lstStyle/>
+          <a:p>
+            <a:pPr algn="ctr"/>
+          </a:p>
+        </p:txBody>
+      </p:sp>
+      <p:sp>
+        <p:nvSpPr>
+          <p:cNvPr id="74" name="C3-E02 text 72" descr="sci-ppt:o072"/>
+          <p:cNvSpPr txBox="1"/>
+          <p:nvPr/>
+        </p:nvSpPr>
+        <p:spPr>
+          <a:xfrm>
+            <a:off x="6861048" y="3034493"/>
+            <a:ext cx="2194560" cy="231648"/>
+          </a:xfrm>
+          <a:prstGeom prst="rect">
+            <a:avLst/>
+          </a:prstGeom>
+          <a:noFill/>
+          <a:effectLst/>
+        </p:spPr>
+        <p:txBody>
+          <a:bodyPr wrap="none" lIns="18288" rIns="18288" tIns="18288" bIns="18288" anchor="t">
+            <a:spAutoFit/>
+          </a:bodyPr>
+          <a:lstStyle/>
+          <a:p>
+            <a:pPr algn="l">
+              <a:spcAft>
+                <a:spcPts val="0"/>
+              </a:spcAft>
+            </a:pPr>
+            <a:r>
+              <a:rPr sz="1200" b="0" i="0">
+                <a:solidFill>
+                  <a:srgbClr val="7FC8F8"/>
+                </a:solidFill>
+                <a:latin typeface="Arial"/>
+              </a:rPr>
+              <a:t>ε = 0.05: w ≥ 6.24 R_A</a:t>
+            </a:r>
+          </a:p>
+        </p:txBody>
+      </p:sp>
+      <p:sp>
+        <p:nvSpPr>
+          <p:cNvPr id="75" name="C3-E02 ellipse 73" descr="sci-ppt:o073"/>
+          <p:cNvSpPr/>
+          <p:nvPr/>
+        </p:nvSpPr>
+        <p:spPr>
+          <a:xfrm>
+            <a:off x="6083808" y="1923377"/>
+            <a:ext cx="146304" cy="146304"/>
+          </a:xfrm>
+          <a:prstGeom prst="ellipse">
+            <a:avLst/>
+          </a:prstGeom>
+          <a:solidFill>
+            <a:srgbClr val="F28BA0"/>
+          </a:solidFill>
+          <a:ln w="12700">
+            <a:solidFill>
+              <a:srgbClr val="F28BA0"/>
+            </a:solidFill>
+          </a:ln>
+          <a:effectLst/>
+        </p:spPr>
+        <p:txBody>
+          <a:bodyPr rtlCol="0" anchor="ctr"/>
+          <a:lstStyle/>
+          <a:p>
+            <a:pPr algn="ctr"/>
+          </a:p>
+        </p:txBody>
+      </p:sp>
+      <p:sp>
+        <p:nvSpPr>
+          <p:cNvPr id="76" name="C3-E02 text 74" descr="sci-ppt:o074"/>
+          <p:cNvSpPr txBox="1"/>
+          <p:nvPr/>
+        </p:nvSpPr>
+        <p:spPr>
+          <a:xfrm>
+            <a:off x="6248400" y="1905089"/>
+            <a:ext cx="2194560" cy="231648"/>
+          </a:xfrm>
+          <a:prstGeom prst="rect">
+            <a:avLst/>
+          </a:prstGeom>
+          <a:noFill/>
+          <a:effectLst/>
+        </p:spPr>
+        <p:txBody>
+          <a:bodyPr wrap="none" lIns="18288" rIns="18288" tIns="18288" bIns="18288" anchor="t">
+            <a:spAutoFit/>
+          </a:bodyPr>
+          <a:lstStyle/>
+          <a:p>
+            <a:pPr algn="l">
+              <a:spcAft>
+                <a:spcPts val="0"/>
+              </a:spcAft>
+            </a:pPr>
+            <a:r>
+              <a:rPr sz="1200" b="0" i="0">
+                <a:solidFill>
+                  <a:srgbClr val="F28BA0"/>
+                </a:solidFill>
+                <a:latin typeface="Arial"/>
+              </a:rPr>
+              <a:t>ε = 0.02: w ≥ 9.95 R_A</a:t>
+            </a:r>
+          </a:p>
+        </p:txBody>
+      </p:sp>
+      <p:sp>
+        <p:nvSpPr>
+          <p:cNvPr id="77" name="C3-E02 text 75" descr="sci-ppt:o075"/>
+          <p:cNvSpPr txBox="1"/>
+          <p:nvPr/>
+        </p:nvSpPr>
+        <p:spPr>
+          <a:xfrm>
+            <a:off x="5760720" y="5733288"/>
+            <a:ext cx="5943600" cy="448563"/>
+          </a:xfrm>
+          <a:prstGeom prst="rect">
+            <a:avLst/>
+          </a:prstGeom>
+          <a:noFill/>
+          <a:effectLst/>
+        </p:spPr>
+        <p:txBody>
+          <a:bodyPr wrap="none" lIns="18288" rIns="18288" tIns="18288" bIns="18288" anchor="t">
+            <a:spAutoFit/>
+          </a:bodyPr>
+          <a:lstStyle/>
+          <a:p>
+            <a:pPr algn="l">
+              <a:spcAft>
+                <a:spcPts val="0"/>
+              </a:spcAft>
+            </a:pPr>
+            <a:r>
+              <a:rPr sz="1300" b="1" i="0">
                 <a:solidFill>
                   <a:srgbClr val="E7F0F3"/>
                 </a:solidFill>
                 <a:latin typeface="Arial"/>
               </a:rPr>
-              <a:t>R_A</a:t>
-            </a:r>
-          </a:p>
-        </p:txBody>
-      </p:sp>
-      <p:sp>
-        <p:nvSpPr>
-          <p:cNvPr id="9" name="C3-E02 text 7" descr="sci-ppt:o007"/>
-          <p:cNvSpPr txBox="1"/>
-          <p:nvPr/>
-        </p:nvSpPr>
-        <p:spPr>
-          <a:xfrm>
-            <a:off x="5486400" y="1188720"/>
-            <a:ext cx="5852160" cy="914400"/>
-          </a:xfrm>
-          <a:prstGeom prst="rect">
-            <a:avLst/>
-          </a:prstGeom>
-          <a:noFill/>
-          <a:effectLst/>
-        </p:spPr>
-        <p:txBody>
-          <a:bodyPr wrap="square" lIns="27432" rIns="27432" tIns="18288" bIns="18288" anchor="ctr">
-            <a:spAutoFit/>
-          </a:bodyPr>
-          <a:lstStyle/>
+              <a:t>w ≥ R_A √[ 2 / (−ln(1 − ε)) ].  A 10 % edge drop needs w = 4.357</a:t>
+            </a:r>
+          </a:p>
           <a:p>
             <a:pPr algn="l">
               <a:spcAft>
@@ -3353,43 +6192,27 @@
               </a:spcAft>
             </a:pPr>
             <a:r>
-              <a:rPr sz="1900" b="0" i="0">
+              <a:rPr sz="1300" b="1" i="0">
                 <a:solidFill>
                   <a:srgbClr val="E7F0F3"/>
                 </a:solidFill>
                 <a:latin typeface="Arial"/>
               </a:rPr>
-              <a:t>Beam axis and array centre coincide.</a:t>
-            </a:r>
-          </a:p>
-          <a:p>
-            <a:pPr algn="l">
-              <a:spcAft>
-                <a:spcPts val="0"/>
-              </a:spcAft>
-            </a:pPr>
-            <a:r>
-              <a:rPr sz="1900" b="0" i="0">
-                <a:solidFill>
-                  <a:srgbClr val="E7F0F3"/>
-                </a:solidFill>
-                <a:latin typeface="Arial"/>
-              </a:rPr>
-              <a:t>Inner circle encloses array sites.</a:t>
-            </a:r>
-          </a:p>
-        </p:txBody>
-      </p:sp>
-      <p:sp>
-        <p:nvSpPr>
-          <p:cNvPr id="10" name="C3-E02 text 8" descr="sci-ppt:o008"/>
+              <a:t>R_A.</a:t>
+            </a:r>
+          </a:p>
+        </p:txBody>
+      </p:sp>
+      <p:sp>
+        <p:nvSpPr>
+          <p:cNvPr id="78" name="C3-E02 text 76" descr="sci-ppt:o076"/>
           <p:cNvSpPr txBox="1"/>
           <p:nvPr/>
         </p:nvSpPr>
         <p:spPr>
           <a:xfrm>
-            <a:off x="5486400" y="2423160"/>
-            <a:ext cx="5760720" cy="822960"/>
+            <a:off x="320040" y="6510528"/>
+            <a:ext cx="11521440" cy="200660"/>
           </a:xfrm>
           <a:prstGeom prst="rect">
             <a:avLst/>
@@ -3398,365 +6221,7 @@
           <a:effectLst/>
         </p:spPr>
         <p:txBody>
-          <a:bodyPr wrap="square" lIns="27432" rIns="27432" tIns="18288" bIns="18288" anchor="ctr">
-            <a:spAutoFit/>
-          </a:bodyPr>
-          <a:lstStyle/>
-          <a:p>
-            <a:pPr algn="l">
-              <a:spcAft>
-                <a:spcPts val="0"/>
-              </a:spcAft>
-            </a:pPr>
-            <a:r>
-              <a:rPr sz="1900" b="0" i="0">
-                <a:solidFill>
-                  <a:srgbClr val="8EDBD4"/>
-                </a:solidFill>
-                <a:latin typeface="Arial"/>
-              </a:rPr>
-              <a:t>F(R_A)/F₀ ≥ 1 − ε</a:t>
-            </a:r>
-          </a:p>
-          <a:p>
-            <a:pPr algn="l">
-              <a:spcAft>
-                <a:spcPts val="0"/>
-              </a:spcAft>
-            </a:pPr>
-            <a:r>
-              <a:rPr sz="1900" b="0" i="0">
-                <a:solidFill>
-                  <a:srgbClr val="8EDBD4"/>
-                </a:solidFill>
-                <a:latin typeface="Arial"/>
-              </a:rPr>
-              <a:t>Uniformity is an optical condition.</a:t>
-            </a:r>
-          </a:p>
-        </p:txBody>
-      </p:sp>
-      <p:cxnSp>
-        <p:nvCxnSpPr>
-          <p:cNvPr id="11" name="C3-E02 line 9" descr="sci-ppt:o009"/>
-          <p:cNvCxnSpPr/>
-          <p:nvPr/>
-        </p:nvCxnSpPr>
-        <p:spPr>
-          <a:xfrm>
-            <a:off x="274320" y="3977639"/>
-            <a:ext cx="11612880" cy="0"/>
-          </a:xfrm>
-          <a:prstGeom prst="line">
-            <a:avLst/>
-          </a:prstGeom>
-          <a:ln w="12700">
-            <a:solidFill>
-              <a:srgbClr val="405967"/>
-            </a:solidFill>
-          </a:ln>
-          <a:effectLst/>
-        </p:spPr>
-      </p:cxnSp>
-      <p:sp>
-        <p:nvSpPr>
-          <p:cNvPr id="12" name="C3-E02 text 10" descr="sci-ppt:o010"/>
-          <p:cNvSpPr txBox="1"/>
-          <p:nvPr/>
-        </p:nvSpPr>
-        <p:spPr>
-          <a:xfrm>
-            <a:off x="320040" y="4096512"/>
-            <a:ext cx="5715000" cy="246888"/>
-          </a:xfrm>
-          <a:prstGeom prst="rect">
-            <a:avLst/>
-          </a:prstGeom>
-          <a:noFill/>
-          <a:effectLst/>
-        </p:spPr>
-        <p:txBody>
-          <a:bodyPr wrap="square" lIns="27432" rIns="27432" tIns="18288" bIns="18288" anchor="ctr">
-            <a:spAutoFit/>
-          </a:bodyPr>
-          <a:lstStyle/>
-          <a:p>
-            <a:pPr algn="l">
-              <a:spcAft>
-                <a:spcPts val="0"/>
-              </a:spcAft>
-            </a:pPr>
-            <a:r>
-              <a:rPr sz="1150" b="0" i="0">
-                <a:solidFill>
-                  <a:srgbClr val="B4C7D2"/>
-                </a:solidFill>
-                <a:latin typeface="Arial"/>
-              </a:rPr>
-              <a:t>• F₀ central fluence</a:t>
-            </a:r>
-          </a:p>
-        </p:txBody>
-      </p:sp>
-      <p:sp>
-        <p:nvSpPr>
-          <p:cNvPr id="13" name="C3-E02 text 11" descr="sci-ppt:o011"/>
-          <p:cNvSpPr txBox="1"/>
-          <p:nvPr/>
-        </p:nvSpPr>
-        <p:spPr>
-          <a:xfrm>
-            <a:off x="6217920" y="4096512"/>
-            <a:ext cx="5715000" cy="246888"/>
-          </a:xfrm>
-          <a:prstGeom prst="rect">
-            <a:avLst/>
-          </a:prstGeom>
-          <a:noFill/>
-          <a:effectLst/>
-        </p:spPr>
-        <p:txBody>
-          <a:bodyPr wrap="square" lIns="27432" rIns="27432" tIns="18288" bIns="18288" anchor="ctr">
-            <a:spAutoFit/>
-          </a:bodyPr>
-          <a:lstStyle/>
-          <a:p>
-            <a:pPr algn="l">
-              <a:spcAft>
-                <a:spcPts val="0"/>
-              </a:spcAft>
-            </a:pPr>
-            <a:r>
-              <a:rPr sz="1150" b="0" i="0">
-                <a:solidFill>
-                  <a:srgbClr val="B4C7D2"/>
-                </a:solidFill>
-                <a:latin typeface="Arial"/>
-              </a:rPr>
-              <a:t>• F(R_A) edge fluence</a:t>
-            </a:r>
-          </a:p>
-        </p:txBody>
-      </p:sp>
-      <p:sp>
-        <p:nvSpPr>
-          <p:cNvPr id="14" name="C3-E02 text 12" descr="sci-ppt:o012"/>
-          <p:cNvSpPr txBox="1"/>
-          <p:nvPr/>
-        </p:nvSpPr>
-        <p:spPr>
-          <a:xfrm>
-            <a:off x="320040" y="4329684"/>
-            <a:ext cx="5715000" cy="246888"/>
-          </a:xfrm>
-          <a:prstGeom prst="rect">
-            <a:avLst/>
-          </a:prstGeom>
-          <a:noFill/>
-          <a:effectLst/>
-        </p:spPr>
-        <p:txBody>
-          <a:bodyPr wrap="square" lIns="27432" rIns="27432" tIns="18288" bIns="18288" anchor="ctr">
-            <a:spAutoFit/>
-          </a:bodyPr>
-          <a:lstStyle/>
-          <a:p>
-            <a:pPr algn="l">
-              <a:spcAft>
-                <a:spcPts val="0"/>
-              </a:spcAft>
-            </a:pPr>
-            <a:r>
-              <a:rPr sz="1150" b="0" i="0">
-                <a:solidFill>
-                  <a:srgbClr val="B4C7D2"/>
-                </a:solidFill>
-                <a:latin typeface="Arial"/>
-              </a:rPr>
-              <a:t>• R_A array radius</a:t>
-            </a:r>
-          </a:p>
-        </p:txBody>
-      </p:sp>
-      <p:sp>
-        <p:nvSpPr>
-          <p:cNvPr id="15" name="C3-E02 text 13" descr="sci-ppt:o013"/>
-          <p:cNvSpPr txBox="1"/>
-          <p:nvPr/>
-        </p:nvSpPr>
-        <p:spPr>
-          <a:xfrm>
-            <a:off x="6217920" y="4329684"/>
-            <a:ext cx="5715000" cy="246888"/>
-          </a:xfrm>
-          <a:prstGeom prst="rect">
-            <a:avLst/>
-          </a:prstGeom>
-          <a:noFill/>
-          <a:effectLst/>
-        </p:spPr>
-        <p:txBody>
-          <a:bodyPr wrap="square" lIns="27432" rIns="27432" tIns="18288" bIns="18288" anchor="ctr">
-            <a:spAutoFit/>
-          </a:bodyPr>
-          <a:lstStyle/>
-          <a:p>
-            <a:pPr algn="l">
-              <a:spcAft>
-                <a:spcPts val="0"/>
-              </a:spcAft>
-            </a:pPr>
-            <a:r>
-              <a:rPr sz="1150" b="0" i="0">
-                <a:solidFill>
-                  <a:srgbClr val="B4C7D2"/>
-                </a:solidFill>
-                <a:latin typeface="Arial"/>
-              </a:rPr>
-              <a:t>• w beam radius</a:t>
-            </a:r>
-          </a:p>
-        </p:txBody>
-      </p:sp>
-      <p:sp>
-        <p:nvSpPr>
-          <p:cNvPr id="16" name="C3-E02 text 14" descr="sci-ppt:o014"/>
-          <p:cNvSpPr txBox="1"/>
-          <p:nvPr/>
-        </p:nvSpPr>
-        <p:spPr>
-          <a:xfrm>
-            <a:off x="320040" y="4562856"/>
-            <a:ext cx="5715000" cy="246888"/>
-          </a:xfrm>
-          <a:prstGeom prst="rect">
-            <a:avLst/>
-          </a:prstGeom>
-          <a:noFill/>
-          <a:effectLst/>
-        </p:spPr>
-        <p:txBody>
-          <a:bodyPr wrap="square" lIns="27432" rIns="27432" tIns="18288" bIns="18288" anchor="ctr">
-            <a:spAutoFit/>
-          </a:bodyPr>
-          <a:lstStyle/>
-          <a:p>
-            <a:pPr algn="l">
-              <a:spcAft>
-                <a:spcPts val="0"/>
-              </a:spcAft>
-            </a:pPr>
-            <a:r>
-              <a:rPr sz="1150" b="0" i="0">
-                <a:solidFill>
-                  <a:srgbClr val="B4C7D2"/>
-                </a:solidFill>
-                <a:latin typeface="Arial"/>
-              </a:rPr>
-              <a:t>• ε allowed decrease; exp, ln</a:t>
-            </a:r>
-          </a:p>
-        </p:txBody>
-      </p:sp>
-      <p:sp>
-        <p:nvSpPr>
-          <p:cNvPr id="17" name="C3-E02 text 15" descr="sci-ppt:o015"/>
-          <p:cNvSpPr txBox="1"/>
-          <p:nvPr/>
-        </p:nvSpPr>
-        <p:spPr>
-          <a:xfrm>
-            <a:off x="320040" y="5596128"/>
-            <a:ext cx="11430000" cy="292608"/>
-          </a:xfrm>
-          <a:prstGeom prst="rect">
-            <a:avLst/>
-          </a:prstGeom>
-          <a:noFill/>
-          <a:effectLst/>
-        </p:spPr>
-        <p:txBody>
-          <a:bodyPr wrap="square" lIns="27432" rIns="27432" tIns="18288" bIns="18288" anchor="ctr">
-            <a:spAutoFit/>
-          </a:bodyPr>
-          <a:lstStyle/>
-          <a:p>
-            <a:pPr algn="l">
-              <a:spcAft>
-                <a:spcPts val="0"/>
-              </a:spcAft>
-            </a:pPr>
-            <a:r>
-              <a:rPr sz="1150" b="0" i="0">
-                <a:solidFill>
-                  <a:srgbClr val="8EDBD4"/>
-                </a:solidFill>
-                <a:latin typeface="Arial"/>
-              </a:rPr>
-              <a:t>Beam axis passes through array center</a:t>
-            </a:r>
-          </a:p>
-        </p:txBody>
-      </p:sp>
-      <p:sp>
-        <p:nvSpPr>
-          <p:cNvPr id="18" name="C3-E02 text 16" descr="sci-ppt:o016"/>
-          <p:cNvSpPr txBox="1"/>
-          <p:nvPr/>
-        </p:nvSpPr>
-        <p:spPr>
-          <a:xfrm>
-            <a:off x="320040" y="5870448"/>
-            <a:ext cx="11430000" cy="292608"/>
-          </a:xfrm>
-          <a:prstGeom prst="rect">
-            <a:avLst/>
-          </a:prstGeom>
-          <a:noFill/>
-          <a:effectLst/>
-        </p:spPr>
-        <p:txBody>
-          <a:bodyPr wrap="square" lIns="27432" rIns="27432" tIns="18288" bIns="18288" anchor="ctr">
-            <a:spAutoFit/>
-          </a:bodyPr>
-          <a:lstStyle/>
-          <a:p>
-            <a:pPr algn="l">
-              <a:spcAft>
-                <a:spcPts val="0"/>
-              </a:spcAft>
-            </a:pPr>
-            <a:r>
-              <a:rPr sz="1150" b="0" i="0">
-                <a:solidFill>
-                  <a:srgbClr val="8EDBD4"/>
-                </a:solidFill>
-                <a:latin typeface="Arial"/>
-              </a:rPr>
-              <a:t>Uniform fluence does not prove uniform activation</a:t>
-            </a:r>
-          </a:p>
-        </p:txBody>
-      </p:sp>
-      <p:sp>
-        <p:nvSpPr>
-          <p:cNvPr id="19" name="C3-E02 text 17" descr="sci-ppt:o017"/>
-          <p:cNvSpPr txBox="1"/>
-          <p:nvPr/>
-        </p:nvSpPr>
-        <p:spPr>
-          <a:xfrm>
-            <a:off x="320040" y="6473952"/>
-            <a:ext cx="11430000" cy="256032"/>
-          </a:xfrm>
-          <a:prstGeom prst="rect">
-            <a:avLst/>
-          </a:prstGeom>
-          <a:noFill/>
-          <a:effectLst/>
-        </p:spPr>
-        <p:txBody>
-          <a:bodyPr wrap="square" lIns="27432" rIns="27432" tIns="18288" bIns="18288" anchor="ctr">
+          <a:bodyPr wrap="none" lIns="18288" rIns="18288" tIns="18288" bIns="18288" anchor="t">
             <a:spAutoFit/>
           </a:bodyPr>
           <a:lstStyle/>
@@ -3773,7 +6238,7 @@
                 </a:solidFill>
                 <a:latin typeface="Arial"/>
               </a:rPr>
-              <a:t>Model schematic; geometry is not to scale.</a:t>
+              <a:t>Optical-uniformity condition of Eq. C3-E02; this is checked before any cavity mechanics.</a:t>
             </a:r>
           </a:p>
         </p:txBody>
